--- a/reports/20261016_room_path_contrastive/progress_nitsu_20261016_room_path_contrastive.pptx
+++ b/reports/20261016_room_path_contrastive/progress_nitsu_20261016_room_path_contrastive.pptx
@@ -1726,6 +1726,18 @@
               <a:t>The diagram follows the user screenshot (factorized model ②). It represents the pooled BiMamba room/path contrastive implementation, not the earlier TF-Locoformer RT60-supervised model. Room code is shared by two path-specific decoding branches, with shared decoder weights. The two views reuse the same room, microphone, source positions and RIR pair; the second view selects two speakers different from the originals and each other, with different speech. Projection heads are auxiliary, used only for contrastive training; CTF decoding uses unprojected codes. No RT60 regression label is used by these contrastive losses. Room code is not guaranteed to encode only physical room properties.</a:t>
             </a:r>
           </a:p>
+          <a:p/>
+          <a:p>
+            <a:r>
+              <a:t>Simplified visual revision: two forward passes through the same parameter-shared factorized estimator, Data A (speakers 1/2) and Data B (speakers 3/4). The two views have the same room, microphone and both physical RIR paths. The room slide highlights the matching room codes. The path slide illustrates matching Path 1 codes; Path 2 follows the same rule. Colored dashed lines denote training-only contrastive comparisons, not CTF inference inputs. CTF PIT aligns the physical paths independently per view. The loss uses projected features; projection heads are omitted for readability. Room negatives are other batch items; path negatives are exclusively the other path within the same item. No source-position invariance claim.</a:t>
+            </a:r>
+          </a:p>
+          <a:p/>
+          <a:p>
+            <a:r>
+              <a:t>Simplified visual revision: two forward passes through the same parameter-shared factorized estimator, Data A (speakers 1/2) and Data B (speakers 3/4). The two views have the same room, microphone and both physical RIR paths. The room slide highlights the matching room codes. The path slide illustrates matching Path 1 codes; Path 2 follows the same rule. Colored dashed lines denote training-only contrastive comparisons, not CTF inference inputs. CTF PIT aligns the physical paths independently per view. The loss uses projected features; projection heads are omitted for readability. Room negatives are other batch items; path negatives are exclusively the other path within the same item. No source-position invariance claim.</a:t>
+            </a:r>
+          </a:p>
         </p:txBody>
       </p:sp>
       <p:sp>
@@ -1827,6 +1839,18 @@
           <a:p>
             <a:r>
               <a:t>Exact loss: symmetric NT-Xent / InfoNCE. Each anchor has one positive, the same identity in the other view. All self similarities are excluded. Similarity is cosine after per-frequency LayerNorm -&gt; Linear64/64 -&gt; SiLU -&gt; Linear64/32, flattening frequency and feature axes and L2 normalization. Temperature 0.1. Room grouping: one global group with batch items as identities; positive is the same item across views, negatives are both views of every other batch item (2(B-1) negatives). Each item is a fixed room/microphone/RIR-pair condition, so this does not impose invariance to changed source positions. Path grouping: separate group per item, two physical paths as identities; one positive is the same path in the other view, two negatives are the other path in both views. Paths from unrelated items are excluded. Both path-2 anchors also have a positive across views (not all symmetric links are drawn). Independent CTF-only PIT in each view aligns predicted paths to reference RIR order. Contrastive path features are taken before adding slot embeddings. Total loss is the mean of the two Sweep v2 PIT losses + 0.01 room loss + 0.01 path loss. Room-only/path-only/control set the corresponding weights to zero. Batch size 2 gives four input waveforms, two room negatives per anchor and two path negatives per anchor. Validation uses primary-view Sweep loss without contrastive terms.</a:t>
+            </a:r>
+          </a:p>
+          <a:p/>
+          <a:p>
+            <a:r>
+              <a:t>Simplified visual revision: two forward passes through the same parameter-shared factorized estimator, Data A (speakers 1/2) and Data B (speakers 3/4). The two views have the same room, microphone and both physical RIR paths. The room slide highlights the matching room codes. The path slide illustrates matching Path 1 codes; Path 2 follows the same rule. Colored dashed lines denote training-only contrastive comparisons, not CTF inference inputs. CTF PIT aligns the physical paths independently per view. The loss uses projected features; projection heads are omitted for readability. Room negatives are other batch items; path negatives are exclusively the other path within the same item. No source-position invariance claim.</a:t>
+            </a:r>
+          </a:p>
+          <a:p/>
+          <a:p>
+            <a:r>
+              <a:t>Simplified visual revision: two forward passes through the same parameter-shared factorized estimator, Data A (speakers 1/2) and Data B (speakers 3/4). The two views have the same room, microphone and both physical RIR paths. The room slide highlights the matching room codes. The path slide illustrates matching Path 1 codes; Path 2 follows the same rule. Colored dashed lines denote training-only contrastive comparisons, not CTF inference inputs. CTF PIT aligns the physical paths independently per view. The loss uses projected features; projection heads are omitted for readability. Room negatives are other batch items; path negatives are exclusively the other path within the same item. No source-position invariance claim.</a:t>
             </a:r>
           </a:p>
         </p:txBody>
@@ -15592,8 +15616,8 @@
         </p:nvSpPr>
         <p:spPr>
           <a:xfrm>
-            <a:off x="347472" y="512064"/>
-            <a:ext cx="11430000" cy="594360"/>
+            <a:off x="365760" y="475488"/>
+            <a:ext cx="10972800" cy="640080"/>
           </a:xfrm>
           <a:prstGeom prst="rect">
             <a:avLst/>
@@ -15601,14 +15625,14 @@
           <a:noFill/>
         </p:spPr>
         <p:txBody>
-          <a:bodyPr wrap="square" lIns="22860" rIns="22860" tIns="13716" bIns="13716">
+          <a:bodyPr wrap="none" lIns="18288" rIns="18288" tIns="9144" bIns="9144">
             <a:spAutoFit/>
           </a:bodyPr>
           <a:lstStyle/>
           <a:p>
             <a:pPr algn="l">
               <a:spcAft>
-                <a:spcPts val="300"/>
+                <a:spcPts val="200"/>
               </a:spcAft>
             </a:pPr>
             <a:r>
@@ -15618,7 +15642,7 @@
                 </a:solidFill>
                 <a:latin typeface="Arial"/>
               </a:rPr>
-              <a:t>CTF(RIR) Estimator: Room / Path Learning</a:t>
+              <a:t>Lroom</a:t>
             </a:r>
           </a:p>
         </p:txBody>
@@ -15631,8 +15655,8 @@
         </p:nvSpPr>
         <p:spPr>
           <a:xfrm>
-            <a:off x="10835640" y="6409944"/>
-            <a:ext cx="521207" cy="246888"/>
+            <a:off x="594360" y="1197864"/>
+            <a:ext cx="10972800" cy="457200"/>
           </a:xfrm>
           <a:prstGeom prst="rect">
             <a:avLst/>
@@ -15640,24 +15664,24 @@
           <a:noFill/>
         </p:spPr>
         <p:txBody>
-          <a:bodyPr wrap="square" lIns="22860" rIns="22860" tIns="13716" bIns="13716">
+          <a:bodyPr wrap="none" lIns="18288" rIns="18288" tIns="9144" bIns="9144">
             <a:spAutoFit/>
           </a:bodyPr>
           <a:lstStyle/>
           <a:p>
-            <a:pPr algn="r">
-              <a:spcAft>
-                <a:spcPts val="300"/>
+            <a:pPr algn="l">
+              <a:spcAft>
+                <a:spcPts val="200"/>
               </a:spcAft>
             </a:pPr>
             <a:r>
-              <a:rPr sz="1200" b="0">
-                <a:solidFill>
-                  <a:srgbClr val="888888"/>
-                </a:solidFill>
-                <a:latin typeface="Arial"/>
+              <a:rPr sz="2400" b="0">
+                <a:solidFill>
+                  <a:srgbClr val="000000"/>
+                </a:solidFill>
+                <a:latin typeface="Noto Sans CJK JP"/>
               </a:rPr>
-              <a:t>1</a:t>
+              <a:t>部屋・配置は同じ。話者・発話だけ替える。</a:t>
             </a:r>
           </a:p>
         </p:txBody>
@@ -15670,8 +15694,8 @@
         </p:nvSpPr>
         <p:spPr>
           <a:xfrm>
-            <a:off x="585216" y="1280160"/>
-            <a:ext cx="10972800" cy="438912"/>
+            <a:off x="530352" y="2249424"/>
+            <a:ext cx="1234440" cy="347472"/>
           </a:xfrm>
           <a:prstGeom prst="rect">
             <a:avLst/>
@@ -15679,24 +15703,24 @@
           <a:noFill/>
         </p:spPr>
         <p:txBody>
-          <a:bodyPr wrap="square" lIns="22860" rIns="22860" tIns="13716" bIns="13716">
+          <a:bodyPr wrap="none" lIns="18288" rIns="18288" tIns="9144" bIns="9144">
             <a:spAutoFit/>
           </a:bodyPr>
           <a:lstStyle/>
           <a:p>
-            <a:pPr algn="l">
-              <a:spcAft>
-                <a:spcPts val="300"/>
+            <a:pPr algn="ctr">
+              <a:spcAft>
+                <a:spcPts val="200"/>
               </a:spcAft>
             </a:pPr>
             <a:r>
-              <a:rPr sz="2200" b="0">
+              <a:rPr sz="2300" b="1">
                 <a:solidFill>
                   <a:srgbClr val="000000"/>
                 </a:solidFill>
                 <a:latin typeface="Arial"/>
               </a:rPr>
-              <a:t>Learn acoustic features that remain consistent when speakers and utterances change.</a:t>
+              <a:t>Data A</a:t>
             </a:r>
           </a:p>
         </p:txBody>
@@ -15709,8 +15733,8 @@
         </p:nvSpPr>
         <p:spPr>
           <a:xfrm>
-            <a:off x="576072" y="2560320"/>
-            <a:ext cx="1188720" cy="868680"/>
+            <a:off x="457200" y="2642616"/>
+            <a:ext cx="1371600" cy="329184"/>
           </a:xfrm>
           <a:prstGeom prst="rect">
             <a:avLst/>
@@ -15718,40 +15742,24 @@
           <a:noFill/>
         </p:spPr>
         <p:txBody>
-          <a:bodyPr wrap="square" lIns="22860" rIns="22860" tIns="13716" bIns="13716">
+          <a:bodyPr wrap="none" lIns="18288" rIns="18288" tIns="9144" bIns="9144">
             <a:spAutoFit/>
           </a:bodyPr>
           <a:lstStyle/>
           <a:p>
             <a:pPr algn="ctr">
               <a:spcAft>
-                <a:spcPts val="300"/>
+                <a:spcPts val="200"/>
               </a:spcAft>
             </a:pPr>
             <a:r>
-              <a:rPr sz="2000" b="0">
+              <a:rPr sz="1700" b="0">
                 <a:solidFill>
                   <a:srgbClr val="000000"/>
                 </a:solidFill>
-                <a:latin typeface="Arial"/>
+                <a:latin typeface="Noto Sans CJK JP"/>
               </a:rPr>
-              <a:t>Mixture</a:t>
-            </a:r>
-          </a:p>
-          <a:p>
-            <a:pPr algn="ctr">
-              <a:spcAft>
-                <a:spcPts val="300"/>
-              </a:spcAft>
-            </a:pPr>
-            <a:r>
-              <a:rPr sz="2000" b="0">
-                <a:solidFill>
-                  <a:srgbClr val="000000"/>
-                </a:solidFill>
-                <a:latin typeface="Arial"/>
-              </a:rPr>
-              <a:t>(spk1 + spk2)</a:t>
+              <a:t>話者 1 + 2</a:t>
             </a:r>
           </a:p>
         </p:txBody>
@@ -15764,23 +15772,22 @@
         </p:nvSpPr>
         <p:spPr>
           <a:xfrm>
-            <a:off x="1810512" y="2039112"/>
-            <a:ext cx="1335024" cy="2240280"/>
+            <a:off x="2029968" y="1920240"/>
+            <a:ext cx="1280160" cy="1755648"/>
           </a:xfrm>
           <a:prstGeom prst="roundRect">
             <a:avLst>
-              <a:gd name="adj" fmla="val 13000"/>
+              <a:gd name="adj" fmla="val 10000"/>
             </a:avLst>
           </a:prstGeom>
           <a:solidFill>
             <a:srgbClr val="F3F3F3"/>
           </a:solidFill>
-          <a:ln w="22860">
+          <a:ln w="21590">
             <a:solidFill>
               <a:srgbClr val="44546A"/>
             </a:solidFill>
           </a:ln>
-          <a:effectLst/>
         </p:spPr>
         <p:style>
           <a:lnRef idx="1">
@@ -15797,14 +15804,10 @@
           </a:fontRef>
         </p:style>
         <p:txBody>
-          <a:bodyPr rtlCol="0" anchor="ctr" wrap="square" lIns="36576" rIns="36576"/>
+          <a:bodyPr rtlCol="0" anchor="ctr" wrap="none" lIns="22860" rIns="22860"/>
           <a:lstStyle/>
           <a:p>
-            <a:pPr algn="ctr">
-              <a:spcAft>
-                <a:spcPts val="100"/>
-              </a:spcAft>
-            </a:pPr>
+            <a:pPr algn="ctr"/>
             <a:r>
               <a:rPr sz="2200" b="1">
                 <a:solidFill>
@@ -15825,19 +15828,18 @@
         </p:nvCxnSpPr>
         <p:spPr>
           <a:xfrm>
-            <a:off x="1645920" y="3154680"/>
-            <a:ext cx="164592" cy="0"/>
+            <a:off x="1783080" y="2798064"/>
+            <a:ext cx="246888" cy="0"/>
           </a:xfrm>
           <a:prstGeom prst="line">
             <a:avLst/>
           </a:prstGeom>
-          <a:ln w="22860">
+          <a:ln w="20320">
             <a:solidFill>
               <a:srgbClr val="44546A"/>
             </a:solidFill>
-            <a:tailEnd type="triangle" w="sm" len="sm"/>
+            <a:tailEnd type="triangle"/>
           </a:ln>
-          <a:effectLst/>
         </p:spPr>
         <p:style>
           <a:lnRef idx="2">
@@ -15846,7 +15848,7 @@
           <a:fillRef idx="0">
             <a:schemeClr val="accent1"/>
           </a:fillRef>
-          <a:effectRef idx="1">
+          <a:effectRef idx="0">
             <a:schemeClr val="accent1"/>
           </a:effectRef>
           <a:fontRef idx="minor">
@@ -15862,18 +15864,17 @@
         </p:nvCxnSpPr>
         <p:spPr>
           <a:xfrm>
-            <a:off x="3145536" y="3154680"/>
-            <a:ext cx="283464" cy="0"/>
+            <a:off x="3310128" y="2798064"/>
+            <a:ext cx="292608" cy="0"/>
           </a:xfrm>
           <a:prstGeom prst="line">
             <a:avLst/>
           </a:prstGeom>
-          <a:ln w="22860">
+          <a:ln w="20320">
             <a:solidFill>
               <a:srgbClr val="44546A"/>
             </a:solidFill>
           </a:ln>
-          <a:effectLst/>
         </p:spPr>
         <p:style>
           <a:lnRef idx="2">
@@ -15882,7 +15883,7 @@
           <a:fillRef idx="0">
             <a:schemeClr val="accent1"/>
           </a:fillRef>
-          <a:effectRef idx="1">
+          <a:effectRef idx="0">
             <a:schemeClr val="accent1"/>
           </a:effectRef>
           <a:fontRef idx="minor">
@@ -15898,18 +15899,17 @@
         </p:nvCxnSpPr>
         <p:spPr>
           <a:xfrm>
-            <a:off x="3429000" y="2286000"/>
-            <a:ext cx="0" cy="1737360"/>
+            <a:off x="3602736" y="2157984"/>
+            <a:ext cx="0" cy="1280160"/>
           </a:xfrm>
           <a:prstGeom prst="line">
             <a:avLst/>
           </a:prstGeom>
-          <a:ln w="22860">
+          <a:ln w="20320">
             <a:solidFill>
               <a:srgbClr val="44546A"/>
             </a:solidFill>
           </a:ln>
-          <a:effectLst/>
         </p:spPr>
         <p:style>
           <a:lnRef idx="2">
@@ -15918,7 +15918,7 @@
           <a:fillRef idx="0">
             <a:schemeClr val="accent1"/>
           </a:fillRef>
-          <a:effectRef idx="1">
+          <a:effectRef idx="0">
             <a:schemeClr val="accent1"/>
           </a:effectRef>
           <a:fontRef idx="minor">
@@ -15928,27 +15928,28 @@
       </p:cxnSp>
       <p:sp>
         <p:nvSpPr>
-          <p:cNvPr id="100" name="Rectangle 99"/>
+          <p:cNvPr id="100" name="Rounded Rectangle 99"/>
           <p:cNvSpPr/>
           <p:nvPr/>
         </p:nvSpPr>
         <p:spPr>
           <a:xfrm>
-            <a:off x="3749039" y="2002536"/>
-            <a:ext cx="2423160" cy="566928"/>
+            <a:off x="3904487" y="1920240"/>
+            <a:ext cx="2267712" cy="475488"/>
           </a:xfrm>
-          <a:prstGeom prst="rect">
-            <a:avLst/>
+          <a:prstGeom prst="roundRect">
+            <a:avLst>
+              <a:gd name="adj" fmla="val 10000"/>
+            </a:avLst>
           </a:prstGeom>
           <a:solidFill>
             <a:srgbClr val="FCE5CD"/>
           </a:solidFill>
-          <a:ln w="22860">
+          <a:ln w="21590">
             <a:solidFill>
               <a:srgbClr val="44546A"/>
             </a:solidFill>
           </a:ln>
-          <a:effectLst/>
         </p:spPr>
         <p:style>
           <a:lnRef idx="1">
@@ -15965,16 +15966,12 @@
           </a:fontRef>
         </p:style>
         <p:txBody>
-          <a:bodyPr rtlCol="0" anchor="ctr" wrap="square" lIns="36576" rIns="36576"/>
+          <a:bodyPr rtlCol="0" anchor="ctr" wrap="none" lIns="22860" rIns="22860"/>
           <a:lstStyle/>
           <a:p>
-            <a:pPr algn="ctr">
-              <a:spcAft>
-                <a:spcPts val="100"/>
-              </a:spcAft>
-            </a:pPr>
+            <a:pPr algn="ctr"/>
             <a:r>
-              <a:rPr sz="2300" b="1">
+              <a:rPr sz="2200" b="1">
                 <a:solidFill>
                   <a:srgbClr val="000000"/>
                 </a:solidFill>
@@ -15993,19 +15990,18 @@
         </p:nvCxnSpPr>
         <p:spPr>
           <a:xfrm>
-            <a:off x="3429000" y="2286000"/>
-            <a:ext cx="320039" cy="0"/>
+            <a:off x="3602736" y="2157984"/>
+            <a:ext cx="301751" cy="0"/>
           </a:xfrm>
           <a:prstGeom prst="line">
             <a:avLst/>
           </a:prstGeom>
-          <a:ln w="22860">
+          <a:ln w="20320">
             <a:solidFill>
               <a:srgbClr val="44546A"/>
             </a:solidFill>
-            <a:tailEnd type="triangle" w="sm" len="sm"/>
+            <a:tailEnd type="triangle"/>
           </a:ln>
-          <a:effectLst/>
         </p:spPr>
         <p:style>
           <a:lnRef idx="2">
@@ -16014,7 +16010,7 @@
           <a:fillRef idx="0">
             <a:schemeClr val="accent1"/>
           </a:fillRef>
-          <a:effectRef idx="1">
+          <a:effectRef idx="0">
             <a:schemeClr val="accent1"/>
           </a:effectRef>
           <a:fontRef idx="minor">
@@ -16024,27 +16020,28 @@
       </p:cxnSp>
       <p:sp>
         <p:nvSpPr>
-          <p:cNvPr id="102" name="Rectangle 101"/>
+          <p:cNvPr id="102" name="Rounded Rectangle 101"/>
           <p:cNvSpPr/>
           <p:nvPr/>
         </p:nvSpPr>
         <p:spPr>
           <a:xfrm>
-            <a:off x="3749039" y="2871216"/>
-            <a:ext cx="2423160" cy="566928"/>
+            <a:off x="3904487" y="2560320"/>
+            <a:ext cx="2267712" cy="475488"/>
           </a:xfrm>
-          <a:prstGeom prst="rect">
-            <a:avLst/>
+          <a:prstGeom prst="roundRect">
+            <a:avLst>
+              <a:gd name="adj" fmla="val 10000"/>
+            </a:avLst>
           </a:prstGeom>
           <a:solidFill>
             <a:srgbClr val="D9EAD3"/>
           </a:solidFill>
-          <a:ln w="22860">
+          <a:ln w="21590">
             <a:solidFill>
-              <a:srgbClr val="44546A"/>
+              <a:srgbClr val="4B8057"/>
             </a:solidFill>
           </a:ln>
-          <a:effectLst/>
         </p:spPr>
         <p:style>
           <a:lnRef idx="1">
@@ -16061,16 +16058,12 @@
           </a:fontRef>
         </p:style>
         <p:txBody>
-          <a:bodyPr rtlCol="0" anchor="ctr" wrap="square" lIns="36576" rIns="36576"/>
+          <a:bodyPr rtlCol="0" anchor="ctr" wrap="none" lIns="22860" rIns="22860"/>
           <a:lstStyle/>
           <a:p>
-            <a:pPr algn="ctr">
-              <a:spcAft>
-                <a:spcPts val="100"/>
-              </a:spcAft>
-            </a:pPr>
+            <a:pPr algn="ctr"/>
             <a:r>
-              <a:rPr sz="2300" b="1">
+              <a:rPr sz="2200" b="1">
                 <a:solidFill>
                   <a:srgbClr val="000000"/>
                 </a:solidFill>
@@ -16089,19 +16082,18 @@
         </p:nvCxnSpPr>
         <p:spPr>
           <a:xfrm>
-            <a:off x="3429000" y="3154680"/>
-            <a:ext cx="320039" cy="0"/>
+            <a:off x="3602736" y="2798063"/>
+            <a:ext cx="301751" cy="0"/>
           </a:xfrm>
           <a:prstGeom prst="line">
             <a:avLst/>
           </a:prstGeom>
-          <a:ln w="22860">
+          <a:ln w="20320">
             <a:solidFill>
               <a:srgbClr val="44546A"/>
             </a:solidFill>
-            <a:tailEnd type="triangle" w="sm" len="sm"/>
+            <a:tailEnd type="triangle"/>
           </a:ln>
-          <a:effectLst/>
         </p:spPr>
         <p:style>
           <a:lnRef idx="2">
@@ -16110,7 +16102,7 @@
           <a:fillRef idx="0">
             <a:schemeClr val="accent1"/>
           </a:fillRef>
-          <a:effectRef idx="1">
+          <a:effectRef idx="0">
             <a:schemeClr val="accent1"/>
           </a:effectRef>
           <a:fontRef idx="minor">
@@ -16120,27 +16112,28 @@
       </p:cxnSp>
       <p:sp>
         <p:nvSpPr>
-          <p:cNvPr id="104" name="Rectangle 103"/>
+          <p:cNvPr id="104" name="Rounded Rectangle 103"/>
           <p:cNvSpPr/>
           <p:nvPr/>
         </p:nvSpPr>
         <p:spPr>
           <a:xfrm>
-            <a:off x="3749039" y="3739896"/>
-            <a:ext cx="2423160" cy="566928"/>
+            <a:off x="3904487" y="3200400"/>
+            <a:ext cx="2267712" cy="475488"/>
           </a:xfrm>
-          <a:prstGeom prst="rect">
-            <a:avLst/>
+          <a:prstGeom prst="roundRect">
+            <a:avLst>
+              <a:gd name="adj" fmla="val 10000"/>
+            </a:avLst>
           </a:prstGeom>
           <a:solidFill>
             <a:srgbClr val="FFF2CC"/>
           </a:solidFill>
-          <a:ln w="22860">
+          <a:ln w="21590">
             <a:solidFill>
               <a:srgbClr val="44546A"/>
             </a:solidFill>
           </a:ln>
-          <a:effectLst/>
         </p:spPr>
         <p:style>
           <a:lnRef idx="1">
@@ -16157,16 +16150,12 @@
           </a:fontRef>
         </p:style>
         <p:txBody>
-          <a:bodyPr rtlCol="0" anchor="ctr" wrap="square" lIns="36576" rIns="36576"/>
+          <a:bodyPr rtlCol="0" anchor="ctr" wrap="none" lIns="22860" rIns="22860"/>
           <a:lstStyle/>
           <a:p>
-            <a:pPr algn="ctr">
-              <a:spcAft>
-                <a:spcPts val="100"/>
-              </a:spcAft>
-            </a:pPr>
+            <a:pPr algn="ctr"/>
             <a:r>
-              <a:rPr sz="2300" b="1">
+              <a:rPr sz="2200" b="1">
                 <a:solidFill>
                   <a:srgbClr val="000000"/>
                 </a:solidFill>
@@ -16185,19 +16174,18 @@
         </p:nvCxnSpPr>
         <p:spPr>
           <a:xfrm>
-            <a:off x="3429000" y="4023359"/>
-            <a:ext cx="320039" cy="0"/>
+            <a:off x="3602736" y="3438144"/>
+            <a:ext cx="301751" cy="0"/>
           </a:xfrm>
           <a:prstGeom prst="line">
             <a:avLst/>
           </a:prstGeom>
-          <a:ln w="22860">
+          <a:ln w="20320">
             <a:solidFill>
               <a:srgbClr val="44546A"/>
             </a:solidFill>
-            <a:tailEnd type="triangle" w="sm" len="sm"/>
+            <a:tailEnd type="triangle"/>
           </a:ln>
-          <a:effectLst/>
         </p:spPr>
         <p:style>
           <a:lnRef idx="2">
@@ -16206,7 +16194,7 @@
           <a:fillRef idx="0">
             <a:schemeClr val="accent1"/>
           </a:fillRef>
-          <a:effectRef idx="1">
+          <a:effectRef idx="0">
             <a:schemeClr val="accent1"/>
           </a:effectRef>
           <a:fontRef idx="minor">
@@ -16222,23 +16210,22 @@
         </p:nvSpPr>
         <p:spPr>
           <a:xfrm>
-            <a:off x="7726679" y="1865376"/>
-            <a:ext cx="1335024" cy="1280160"/>
+            <a:off x="7607808" y="1810512"/>
+            <a:ext cx="1335024" cy="713232"/>
           </a:xfrm>
           <a:prstGeom prst="roundRect">
             <a:avLst>
-              <a:gd name="adj" fmla="val 13000"/>
+              <a:gd name="adj" fmla="val 10000"/>
             </a:avLst>
           </a:prstGeom>
           <a:solidFill>
             <a:srgbClr val="F3F3F3"/>
           </a:solidFill>
-          <a:ln w="22860">
+          <a:ln w="21590">
             <a:solidFill>
               <a:srgbClr val="44546A"/>
             </a:solidFill>
           </a:ln>
-          <a:effectLst/>
         </p:spPr>
         <p:style>
           <a:lnRef idx="1">
@@ -16255,16 +16242,12 @@
           </a:fontRef>
         </p:style>
         <p:txBody>
-          <a:bodyPr rtlCol="0" anchor="ctr" wrap="square" lIns="36576" rIns="36576"/>
+          <a:bodyPr rtlCol="0" anchor="ctr" wrap="none" lIns="22860" rIns="22860"/>
           <a:lstStyle/>
           <a:p>
-            <a:pPr algn="ctr">
-              <a:spcAft>
-                <a:spcPts val="100"/>
-              </a:spcAft>
-            </a:pPr>
+            <a:pPr algn="ctr"/>
             <a:r>
-              <a:rPr sz="2200" b="1">
+              <a:rPr sz="2100" b="1">
                 <a:solidFill>
                   <a:srgbClr val="000000"/>
                 </a:solidFill>
@@ -16283,23 +16266,22 @@
         </p:nvSpPr>
         <p:spPr>
           <a:xfrm>
-            <a:off x="7726679" y="3602736"/>
-            <a:ext cx="1335024" cy="1280160"/>
+            <a:off x="7607808" y="3090672"/>
+            <a:ext cx="1335024" cy="713232"/>
           </a:xfrm>
           <a:prstGeom prst="roundRect">
             <a:avLst>
-              <a:gd name="adj" fmla="val 13000"/>
+              <a:gd name="adj" fmla="val 10000"/>
             </a:avLst>
           </a:prstGeom>
           <a:solidFill>
             <a:srgbClr val="F3F3F3"/>
           </a:solidFill>
-          <a:ln w="22860">
+          <a:ln w="21590">
             <a:solidFill>
               <a:srgbClr val="44546A"/>
             </a:solidFill>
           </a:ln>
-          <a:effectLst/>
         </p:spPr>
         <p:style>
           <a:lnRef idx="1">
@@ -16316,16 +16298,12 @@
           </a:fontRef>
         </p:style>
         <p:txBody>
-          <a:bodyPr rtlCol="0" anchor="ctr" wrap="square" lIns="36576" rIns="36576"/>
+          <a:bodyPr rtlCol="0" anchor="ctr" wrap="none" lIns="22860" rIns="22860"/>
           <a:lstStyle/>
           <a:p>
-            <a:pPr algn="ctr">
-              <a:spcAft>
-                <a:spcPts val="100"/>
-              </a:spcAft>
-            </a:pPr>
+            <a:pPr algn="ctr"/>
             <a:r>
-              <a:rPr sz="2200" b="1">
+              <a:rPr sz="2100" b="1">
                 <a:solidFill>
                   <a:srgbClr val="000000"/>
                 </a:solidFill>
@@ -16344,19 +16322,18 @@
         </p:nvCxnSpPr>
         <p:spPr>
           <a:xfrm>
-            <a:off x="6172200" y="2286000"/>
-            <a:ext cx="1554479" cy="0"/>
+            <a:off x="6172200" y="2157984"/>
+            <a:ext cx="1435608" cy="0"/>
           </a:xfrm>
           <a:prstGeom prst="line">
             <a:avLst/>
           </a:prstGeom>
-          <a:ln w="22860">
+          <a:ln w="20320">
             <a:solidFill>
               <a:srgbClr val="44546A"/>
             </a:solidFill>
-            <a:tailEnd type="triangle" w="sm" len="sm"/>
+            <a:tailEnd type="triangle"/>
           </a:ln>
-          <a:effectLst/>
         </p:spPr>
         <p:style>
           <a:lnRef idx="2">
@@ -16365,7 +16342,7 @@
           <a:fillRef idx="0">
             <a:schemeClr val="accent1"/>
           </a:fillRef>
-          <a:effectRef idx="1">
+          <a:effectRef idx="0">
             <a:schemeClr val="accent1"/>
           </a:effectRef>
           <a:fontRef idx="minor">
@@ -16381,19 +16358,18 @@
         </p:nvCxnSpPr>
         <p:spPr>
           <a:xfrm>
-            <a:off x="6172200" y="4023360"/>
-            <a:ext cx="1554479" cy="0"/>
+            <a:off x="6172200" y="3438144"/>
+            <a:ext cx="1435608" cy="0"/>
           </a:xfrm>
           <a:prstGeom prst="line">
             <a:avLst/>
           </a:prstGeom>
-          <a:ln w="22860">
+          <a:ln w="20320">
             <a:solidFill>
               <a:srgbClr val="44546A"/>
             </a:solidFill>
-            <a:tailEnd type="triangle" w="sm" len="sm"/>
+            <a:tailEnd type="triangle"/>
           </a:ln>
-          <a:effectLst/>
         </p:spPr>
         <p:style>
           <a:lnRef idx="2">
@@ -16402,7 +16378,7 @@
           <a:fillRef idx="0">
             <a:schemeClr val="accent1"/>
           </a:fillRef>
-          <a:effectRef idx="1">
+          <a:effectRef idx="0">
             <a:schemeClr val="accent1"/>
           </a:effectRef>
           <a:fontRef idx="minor">
@@ -16418,18 +16394,17 @@
         </p:nvCxnSpPr>
         <p:spPr>
           <a:xfrm>
-            <a:off x="6172200" y="3154680"/>
-            <a:ext cx="905256" cy="0"/>
+            <a:off x="6172200" y="2798064"/>
+            <a:ext cx="978408" cy="0"/>
           </a:xfrm>
           <a:prstGeom prst="line">
             <a:avLst/>
           </a:prstGeom>
-          <a:ln w="22860">
+          <a:ln w="20320">
             <a:solidFill>
               <a:srgbClr val="44546A"/>
             </a:solidFill>
           </a:ln>
-          <a:effectLst/>
         </p:spPr>
         <p:style>
           <a:lnRef idx="2">
@@ -16438,7 +16413,7 @@
           <a:fillRef idx="0">
             <a:schemeClr val="accent1"/>
           </a:fillRef>
-          <a:effectRef idx="1">
+          <a:effectRef idx="0">
             <a:schemeClr val="accent1"/>
           </a:effectRef>
           <a:fontRef idx="minor">
@@ -16454,18 +16429,17 @@
         </p:nvCxnSpPr>
         <p:spPr>
           <a:xfrm>
-            <a:off x="7077456" y="2688336"/>
-            <a:ext cx="0" cy="1801368"/>
+            <a:off x="7150608" y="2377440"/>
+            <a:ext cx="0" cy="868680"/>
           </a:xfrm>
           <a:prstGeom prst="line">
             <a:avLst/>
           </a:prstGeom>
-          <a:ln w="22860">
+          <a:ln w="20320">
             <a:solidFill>
               <a:srgbClr val="44546A"/>
             </a:solidFill>
           </a:ln>
-          <a:effectLst/>
         </p:spPr>
         <p:style>
           <a:lnRef idx="2">
@@ -16474,7 +16448,7 @@
           <a:fillRef idx="0">
             <a:schemeClr val="accent1"/>
           </a:fillRef>
-          <a:effectRef idx="1">
+          <a:effectRef idx="0">
             <a:schemeClr val="accent1"/>
           </a:effectRef>
           <a:fontRef idx="minor">
@@ -16490,19 +16464,18 @@
         </p:nvCxnSpPr>
         <p:spPr>
           <a:xfrm>
-            <a:off x="7077456" y="2688336"/>
-            <a:ext cx="649223" cy="0"/>
+            <a:off x="7150608" y="2377440"/>
+            <a:ext cx="457200" cy="0"/>
           </a:xfrm>
           <a:prstGeom prst="line">
             <a:avLst/>
           </a:prstGeom>
-          <a:ln w="22860">
+          <a:ln w="20320">
             <a:solidFill>
               <a:srgbClr val="44546A"/>
             </a:solidFill>
-            <a:tailEnd type="triangle" w="sm" len="sm"/>
+            <a:tailEnd type="triangle"/>
           </a:ln>
-          <a:effectLst/>
         </p:spPr>
         <p:style>
           <a:lnRef idx="2">
@@ -16511,7 +16484,7 @@
           <a:fillRef idx="0">
             <a:schemeClr val="accent1"/>
           </a:fillRef>
-          <a:effectRef idx="1">
+          <a:effectRef idx="0">
             <a:schemeClr val="accent1"/>
           </a:effectRef>
           <a:fontRef idx="minor">
@@ -16527,19 +16500,18 @@
         </p:nvCxnSpPr>
         <p:spPr>
           <a:xfrm>
-            <a:off x="7077456" y="4489704"/>
-            <a:ext cx="649223" cy="0"/>
+            <a:off x="7150608" y="3246120"/>
+            <a:ext cx="457200" cy="0"/>
           </a:xfrm>
           <a:prstGeom prst="line">
             <a:avLst/>
           </a:prstGeom>
-          <a:ln w="22860">
+          <a:ln w="20320">
             <a:solidFill>
               <a:srgbClr val="44546A"/>
             </a:solidFill>
-            <a:tailEnd type="triangle" w="sm" len="sm"/>
+            <a:tailEnd type="triangle"/>
           </a:ln>
-          <a:effectLst/>
         </p:spPr>
         <p:style>
           <a:lnRef idx="2">
@@ -16548,7 +16520,7 @@
           <a:fillRef idx="0">
             <a:schemeClr val="accent1"/>
           </a:fillRef>
-          <a:effectRef idx="1">
+          <a:effectRef idx="0">
             <a:schemeClr val="accent1"/>
           </a:effectRef>
           <a:fontRef idx="minor">
@@ -16564,19 +16536,18 @@
         </p:nvCxnSpPr>
         <p:spPr>
           <a:xfrm>
-            <a:off x="9061704" y="2505456"/>
-            <a:ext cx="429768" cy="0"/>
+            <a:off x="8942832" y="2157984"/>
+            <a:ext cx="402336" cy="0"/>
           </a:xfrm>
           <a:prstGeom prst="line">
             <a:avLst/>
           </a:prstGeom>
-          <a:ln w="22860">
+          <a:ln w="20320">
             <a:solidFill>
               <a:srgbClr val="44546A"/>
             </a:solidFill>
-            <a:tailEnd type="triangle" w="sm" len="sm"/>
+            <a:tailEnd type="triangle"/>
           </a:ln>
-          <a:effectLst/>
         </p:spPr>
         <p:style>
           <a:lnRef idx="2">
@@ -16585,44 +16556,7 @@
           <a:fillRef idx="0">
             <a:schemeClr val="accent1"/>
           </a:fillRef>
-          <a:effectRef idx="1">
-            <a:schemeClr val="accent1"/>
-          </a:effectRef>
-          <a:fontRef idx="minor">
-            <a:schemeClr val="tx1"/>
-          </a:fontRef>
-        </p:style>
-      </p:cxnSp>
-      <p:cxnSp>
-        <p:nvCxnSpPr>
-          <p:cNvPr id="115" name="Connector 114"/>
-          <p:cNvCxnSpPr/>
-          <p:nvPr/>
-        </p:nvCxnSpPr>
-        <p:spPr>
-          <a:xfrm>
-            <a:off x="9061704" y="4242816"/>
-            <a:ext cx="429768" cy="0"/>
-          </a:xfrm>
-          <a:prstGeom prst="line">
-            <a:avLst/>
-          </a:prstGeom>
-          <a:ln w="22860">
-            <a:solidFill>
-              <a:srgbClr val="44546A"/>
-            </a:solidFill>
-            <a:tailEnd type="triangle" w="sm" len="sm"/>
-          </a:ln>
-          <a:effectLst/>
-        </p:spPr>
-        <p:style>
-          <a:lnRef idx="2">
-            <a:schemeClr val="accent1"/>
-          </a:lnRef>
-          <a:fillRef idx="0">
-            <a:schemeClr val="accent1"/>
-          </a:fillRef>
-          <a:effectRef idx="1">
+          <a:effectRef idx="0">
             <a:schemeClr val="accent1"/>
           </a:effectRef>
           <a:fontRef idx="minor">
@@ -16632,14 +16566,14 @@
       </p:cxnSp>
       <p:sp>
         <p:nvSpPr>
-          <p:cNvPr id="116" name="TextBox 115"/>
+          <p:cNvPr id="115" name="TextBox 114"/>
           <p:cNvSpPr txBox="1"/>
           <p:nvPr/>
         </p:nvSpPr>
         <p:spPr>
           <a:xfrm>
-            <a:off x="9610344" y="2240280"/>
-            <a:ext cx="1645920" cy="457200"/>
+            <a:off x="9464040" y="1938528"/>
+            <a:ext cx="1463040" cy="384048"/>
           </a:xfrm>
           <a:prstGeom prst="rect">
             <a:avLst/>
@@ -16647,18 +16581,18 @@
           <a:noFill/>
         </p:spPr>
         <p:txBody>
-          <a:bodyPr wrap="square" lIns="22860" rIns="22860" tIns="13716" bIns="13716">
+          <a:bodyPr wrap="none" lIns="18288" rIns="18288" tIns="9144" bIns="9144">
             <a:spAutoFit/>
           </a:bodyPr>
           <a:lstStyle/>
           <a:p>
             <a:pPr algn="l">
               <a:spcAft>
-                <a:spcPts val="300"/>
+                <a:spcPts val="200"/>
               </a:spcAft>
             </a:pPr>
             <a:r>
-              <a:rPr sz="2600" b="1">
+              <a:rPr sz="2400" b="1">
                 <a:solidFill>
                   <a:srgbClr val="000000"/>
                 </a:solidFill>
@@ -16669,6 +16603,42 @@
           </a:p>
         </p:txBody>
       </p:sp>
+      <p:cxnSp>
+        <p:nvCxnSpPr>
+          <p:cNvPr id="116" name="Connector 115"/>
+          <p:cNvCxnSpPr/>
+          <p:nvPr/>
+        </p:nvCxnSpPr>
+        <p:spPr>
+          <a:xfrm>
+            <a:off x="8942832" y="3438144"/>
+            <a:ext cx="402336" cy="0"/>
+          </a:xfrm>
+          <a:prstGeom prst="line">
+            <a:avLst/>
+          </a:prstGeom>
+          <a:ln w="20320">
+            <a:solidFill>
+              <a:srgbClr val="44546A"/>
+            </a:solidFill>
+            <a:tailEnd type="triangle"/>
+          </a:ln>
+        </p:spPr>
+        <p:style>
+          <a:lnRef idx="2">
+            <a:schemeClr val="accent1"/>
+          </a:lnRef>
+          <a:fillRef idx="0">
+            <a:schemeClr val="accent1"/>
+          </a:fillRef>
+          <a:effectRef idx="0">
+            <a:schemeClr val="accent1"/>
+          </a:effectRef>
+          <a:fontRef idx="minor">
+            <a:schemeClr val="tx1"/>
+          </a:fontRef>
+        </p:style>
+      </p:cxnSp>
       <p:sp>
         <p:nvSpPr>
           <p:cNvPr id="117" name="TextBox 116"/>
@@ -16677,8 +16647,8 @@
         </p:nvSpPr>
         <p:spPr>
           <a:xfrm>
-            <a:off x="9610344" y="3977639"/>
-            <a:ext cx="1645920" cy="457200"/>
+            <a:off x="9464040" y="3218687"/>
+            <a:ext cx="1463040" cy="384048"/>
           </a:xfrm>
           <a:prstGeom prst="rect">
             <a:avLst/>
@@ -16686,18 +16656,18 @@
           <a:noFill/>
         </p:spPr>
         <p:txBody>
-          <a:bodyPr wrap="square" lIns="22860" rIns="22860" tIns="13716" bIns="13716">
+          <a:bodyPr wrap="none" lIns="18288" rIns="18288" tIns="9144" bIns="9144">
             <a:spAutoFit/>
           </a:bodyPr>
           <a:lstStyle/>
           <a:p>
             <a:pPr algn="l">
               <a:spcAft>
-                <a:spcPts val="300"/>
+                <a:spcPts val="200"/>
               </a:spcAft>
             </a:pPr>
             <a:r>
-              <a:rPr sz="2600" b="1">
+              <a:rPr sz="2400" b="1">
                 <a:solidFill>
                   <a:srgbClr val="000000"/>
                 </a:solidFill>
@@ -16716,8 +16686,8 @@
         </p:nvSpPr>
         <p:spPr>
           <a:xfrm>
-            <a:off x="7296912" y="4965192"/>
-            <a:ext cx="2468880" cy="274320"/>
+            <a:off x="530352" y="4764024"/>
+            <a:ext cx="1234440" cy="347472"/>
           </a:xfrm>
           <a:prstGeom prst="rect">
             <a:avLst/>
@@ -16725,24 +16695,24 @@
           <a:noFill/>
         </p:spPr>
         <p:txBody>
-          <a:bodyPr wrap="square" lIns="22860" rIns="22860" tIns="13716" bIns="13716">
+          <a:bodyPr wrap="none" lIns="18288" rIns="18288" tIns="9144" bIns="9144">
             <a:spAutoFit/>
           </a:bodyPr>
           <a:lstStyle/>
           <a:p>
             <a:pPr algn="ctr">
               <a:spcAft>
-                <a:spcPts val="300"/>
+                <a:spcPts val="200"/>
               </a:spcAft>
             </a:pPr>
             <a:r>
-              <a:rPr sz="1500" b="0">
-                <a:solidFill>
-                  <a:srgbClr val="666666"/>
+              <a:rPr sz="2300" b="1">
+                <a:solidFill>
+                  <a:srgbClr val="000000"/>
                 </a:solidFill>
                 <a:latin typeface="Arial"/>
               </a:rPr>
-              <a:t>Shared decoder weights</a:t>
+              <a:t>Data B</a:t>
             </a:r>
           </a:p>
         </p:txBody>
@@ -16755,8 +16725,8 @@
         </p:nvSpPr>
         <p:spPr>
           <a:xfrm>
-            <a:off x="603504" y="5001768"/>
-            <a:ext cx="6355080" cy="384048"/>
+            <a:off x="457200" y="5157216"/>
+            <a:ext cx="1371600" cy="329184"/>
           </a:xfrm>
           <a:prstGeom prst="rect">
             <a:avLst/>
@@ -16764,51 +16734,52 @@
           <a:noFill/>
         </p:spPr>
         <p:txBody>
-          <a:bodyPr wrap="square" lIns="22860" rIns="22860" tIns="13716" bIns="13716">
+          <a:bodyPr wrap="none" lIns="18288" rIns="18288" tIns="9144" bIns="9144">
             <a:spAutoFit/>
           </a:bodyPr>
           <a:lstStyle/>
           <a:p>
-            <a:pPr algn="l">
-              <a:spcAft>
-                <a:spcPts val="300"/>
+            <a:pPr algn="ctr">
+              <a:spcAft>
+                <a:spcPts val="200"/>
               </a:spcAft>
             </a:pPr>
             <a:r>
-              <a:rPr sz="2100" b="1">
+              <a:rPr sz="1700" b="0">
                 <a:solidFill>
                   <a:srgbClr val="000000"/>
                 </a:solidFill>
-                <a:latin typeface="Arial"/>
+                <a:latin typeface="Noto Sans CJK JP"/>
               </a:rPr>
-              <a:t>Two views → the same encoder and decoder</a:t>
+              <a:t>話者 3 + 4</a:t>
             </a:r>
           </a:p>
         </p:txBody>
       </p:sp>
       <p:sp>
         <p:nvSpPr>
-          <p:cNvPr id="120" name="Rectangle 119"/>
+          <p:cNvPr id="120" name="Rounded Rectangle 119"/>
           <p:cNvSpPr/>
           <p:nvPr/>
         </p:nvSpPr>
         <p:spPr>
           <a:xfrm>
-            <a:off x="630936" y="5513832"/>
-            <a:ext cx="3072384" cy="539496"/>
+            <a:off x="2029968" y="4434840"/>
+            <a:ext cx="1280160" cy="1755648"/>
           </a:xfrm>
-          <a:prstGeom prst="rect">
-            <a:avLst/>
+          <a:prstGeom prst="roundRect">
+            <a:avLst>
+              <a:gd name="adj" fmla="val 10000"/>
+            </a:avLst>
           </a:prstGeom>
           <a:solidFill>
-            <a:srgbClr val="FFFFFF"/>
+            <a:srgbClr val="F3F3F3"/>
           </a:solidFill>
-          <a:ln w="22860">
+          <a:ln w="21590">
             <a:solidFill>
               <a:srgbClr val="44546A"/>
             </a:solidFill>
           </a:ln>
-          <a:effectLst/>
         </p:spPr>
         <p:style>
           <a:lnRef idx="1">
@@ -16825,49 +16796,484 @@
           </a:fontRef>
         </p:style>
         <p:txBody>
-          <a:bodyPr rtlCol="0" anchor="ctr" wrap="square" lIns="36576" rIns="36576"/>
+          <a:bodyPr rtlCol="0" anchor="ctr" wrap="none" lIns="22860" rIns="22860"/>
           <a:lstStyle/>
           <a:p>
-            <a:pPr algn="ctr">
-              <a:spcAft>
-                <a:spcPts val="100"/>
-              </a:spcAft>
-            </a:pPr>
+            <a:pPr algn="ctr"/>
             <a:r>
-              <a:rPr sz="1900" b="0">
+              <a:rPr sz="2200" b="1">
                 <a:solidFill>
                   <a:srgbClr val="000000"/>
                 </a:solidFill>
                 <a:latin typeface="Arial"/>
               </a:rPr>
-              <a:t>View A: original speakers</a:t>
+              <a:t>Encoder</a:t>
+            </a:r>
+          </a:p>
+        </p:txBody>
+      </p:sp>
+      <p:cxnSp>
+        <p:nvCxnSpPr>
+          <p:cNvPr id="121" name="Connector 120"/>
+          <p:cNvCxnSpPr/>
+          <p:nvPr/>
+        </p:nvCxnSpPr>
+        <p:spPr>
+          <a:xfrm>
+            <a:off x="1783080" y="5312664"/>
+            <a:ext cx="246888" cy="0"/>
+          </a:xfrm>
+          <a:prstGeom prst="line">
+            <a:avLst/>
+          </a:prstGeom>
+          <a:ln w="20320">
+            <a:solidFill>
+              <a:srgbClr val="44546A"/>
+            </a:solidFill>
+            <a:tailEnd type="triangle"/>
+          </a:ln>
+        </p:spPr>
+        <p:style>
+          <a:lnRef idx="2">
+            <a:schemeClr val="accent1"/>
+          </a:lnRef>
+          <a:fillRef idx="0">
+            <a:schemeClr val="accent1"/>
+          </a:fillRef>
+          <a:effectRef idx="0">
+            <a:schemeClr val="accent1"/>
+          </a:effectRef>
+          <a:fontRef idx="minor">
+            <a:schemeClr val="tx1"/>
+          </a:fontRef>
+        </p:style>
+      </p:cxnSp>
+      <p:cxnSp>
+        <p:nvCxnSpPr>
+          <p:cNvPr id="122" name="Connector 121"/>
+          <p:cNvCxnSpPr/>
+          <p:nvPr/>
+        </p:nvCxnSpPr>
+        <p:spPr>
+          <a:xfrm>
+            <a:off x="3310128" y="5312664"/>
+            <a:ext cx="292608" cy="0"/>
+          </a:xfrm>
+          <a:prstGeom prst="line">
+            <a:avLst/>
+          </a:prstGeom>
+          <a:ln w="20320">
+            <a:solidFill>
+              <a:srgbClr val="44546A"/>
+            </a:solidFill>
+          </a:ln>
+        </p:spPr>
+        <p:style>
+          <a:lnRef idx="2">
+            <a:schemeClr val="accent1"/>
+          </a:lnRef>
+          <a:fillRef idx="0">
+            <a:schemeClr val="accent1"/>
+          </a:fillRef>
+          <a:effectRef idx="0">
+            <a:schemeClr val="accent1"/>
+          </a:effectRef>
+          <a:fontRef idx="minor">
+            <a:schemeClr val="tx1"/>
+          </a:fontRef>
+        </p:style>
+      </p:cxnSp>
+      <p:cxnSp>
+        <p:nvCxnSpPr>
+          <p:cNvPr id="123" name="Connector 122"/>
+          <p:cNvCxnSpPr/>
+          <p:nvPr/>
+        </p:nvCxnSpPr>
+        <p:spPr>
+          <a:xfrm>
+            <a:off x="3602736" y="4672584"/>
+            <a:ext cx="0" cy="1280160"/>
+          </a:xfrm>
+          <a:prstGeom prst="line">
+            <a:avLst/>
+          </a:prstGeom>
+          <a:ln w="20320">
+            <a:solidFill>
+              <a:srgbClr val="44546A"/>
+            </a:solidFill>
+          </a:ln>
+        </p:spPr>
+        <p:style>
+          <a:lnRef idx="2">
+            <a:schemeClr val="accent1"/>
+          </a:lnRef>
+          <a:fillRef idx="0">
+            <a:schemeClr val="accent1"/>
+          </a:fillRef>
+          <a:effectRef idx="0">
+            <a:schemeClr val="accent1"/>
+          </a:effectRef>
+          <a:fontRef idx="minor">
+            <a:schemeClr val="tx1"/>
+          </a:fontRef>
+        </p:style>
+      </p:cxnSp>
+      <p:sp>
+        <p:nvSpPr>
+          <p:cNvPr id="124" name="Rounded Rectangle 123"/>
+          <p:cNvSpPr/>
+          <p:nvPr/>
+        </p:nvSpPr>
+        <p:spPr>
+          <a:xfrm>
+            <a:off x="3904487" y="4434840"/>
+            <a:ext cx="2267712" cy="475488"/>
+          </a:xfrm>
+          <a:prstGeom prst="roundRect">
+            <a:avLst>
+              <a:gd name="adj" fmla="val 10000"/>
+            </a:avLst>
+          </a:prstGeom>
+          <a:solidFill>
+            <a:srgbClr val="FCE5CD"/>
+          </a:solidFill>
+          <a:ln w="21590">
+            <a:solidFill>
+              <a:srgbClr val="44546A"/>
+            </a:solidFill>
+          </a:ln>
+        </p:spPr>
+        <p:style>
+          <a:lnRef idx="1">
+            <a:schemeClr val="accent1"/>
+          </a:lnRef>
+          <a:fillRef idx="3">
+            <a:schemeClr val="accent1"/>
+          </a:fillRef>
+          <a:effectRef idx="0">
+            <a:schemeClr val="accent1"/>
+          </a:effectRef>
+          <a:fontRef idx="minor">
+            <a:schemeClr val="lt1"/>
+          </a:fontRef>
+        </p:style>
+        <p:txBody>
+          <a:bodyPr rtlCol="0" anchor="ctr" wrap="none" lIns="22860" rIns="22860"/>
+          <a:lstStyle/>
+          <a:p>
+            <a:pPr algn="ctr"/>
+            <a:r>
+              <a:rPr sz="2200" b="1">
+                <a:solidFill>
+                  <a:srgbClr val="000000"/>
+                </a:solidFill>
+                <a:latin typeface="Arial"/>
+              </a:rPr>
+              <a:t>Path 1 emb</a:t>
+            </a:r>
+          </a:p>
+        </p:txBody>
+      </p:sp>
+      <p:cxnSp>
+        <p:nvCxnSpPr>
+          <p:cNvPr id="125" name="Connector 124"/>
+          <p:cNvCxnSpPr/>
+          <p:nvPr/>
+        </p:nvCxnSpPr>
+        <p:spPr>
+          <a:xfrm>
+            <a:off x="3602736" y="4672584"/>
+            <a:ext cx="301751" cy="0"/>
+          </a:xfrm>
+          <a:prstGeom prst="line">
+            <a:avLst/>
+          </a:prstGeom>
+          <a:ln w="20320">
+            <a:solidFill>
+              <a:srgbClr val="44546A"/>
+            </a:solidFill>
+            <a:tailEnd type="triangle"/>
+          </a:ln>
+        </p:spPr>
+        <p:style>
+          <a:lnRef idx="2">
+            <a:schemeClr val="accent1"/>
+          </a:lnRef>
+          <a:fillRef idx="0">
+            <a:schemeClr val="accent1"/>
+          </a:fillRef>
+          <a:effectRef idx="0">
+            <a:schemeClr val="accent1"/>
+          </a:effectRef>
+          <a:fontRef idx="minor">
+            <a:schemeClr val="tx1"/>
+          </a:fontRef>
+        </p:style>
+      </p:cxnSp>
+      <p:sp>
+        <p:nvSpPr>
+          <p:cNvPr id="126" name="Rounded Rectangle 125"/>
+          <p:cNvSpPr/>
+          <p:nvPr/>
+        </p:nvSpPr>
+        <p:spPr>
+          <a:xfrm>
+            <a:off x="3904487" y="5074920"/>
+            <a:ext cx="2267712" cy="475488"/>
+          </a:xfrm>
+          <a:prstGeom prst="roundRect">
+            <a:avLst>
+              <a:gd name="adj" fmla="val 10000"/>
+            </a:avLst>
+          </a:prstGeom>
+          <a:solidFill>
+            <a:srgbClr val="D9EAD3"/>
+          </a:solidFill>
+          <a:ln w="21590">
+            <a:solidFill>
+              <a:srgbClr val="4B8057"/>
+            </a:solidFill>
+          </a:ln>
+        </p:spPr>
+        <p:style>
+          <a:lnRef idx="1">
+            <a:schemeClr val="accent1"/>
+          </a:lnRef>
+          <a:fillRef idx="3">
+            <a:schemeClr val="accent1"/>
+          </a:fillRef>
+          <a:effectRef idx="0">
+            <a:schemeClr val="accent1"/>
+          </a:effectRef>
+          <a:fontRef idx="minor">
+            <a:schemeClr val="lt1"/>
+          </a:fontRef>
+        </p:style>
+        <p:txBody>
+          <a:bodyPr rtlCol="0" anchor="ctr" wrap="none" lIns="22860" rIns="22860"/>
+          <a:lstStyle/>
+          <a:p>
+            <a:pPr algn="ctr"/>
+            <a:r>
+              <a:rPr sz="2200" b="1">
+                <a:solidFill>
+                  <a:srgbClr val="000000"/>
+                </a:solidFill>
+                <a:latin typeface="Arial"/>
+              </a:rPr>
+              <a:t>Room emb</a:t>
+            </a:r>
+          </a:p>
+        </p:txBody>
+      </p:sp>
+      <p:cxnSp>
+        <p:nvCxnSpPr>
+          <p:cNvPr id="127" name="Connector 126"/>
+          <p:cNvCxnSpPr/>
+          <p:nvPr/>
+        </p:nvCxnSpPr>
+        <p:spPr>
+          <a:xfrm>
+            <a:off x="3602736" y="5312664"/>
+            <a:ext cx="301751" cy="0"/>
+          </a:xfrm>
+          <a:prstGeom prst="line">
+            <a:avLst/>
+          </a:prstGeom>
+          <a:ln w="20320">
+            <a:solidFill>
+              <a:srgbClr val="44546A"/>
+            </a:solidFill>
+            <a:tailEnd type="triangle"/>
+          </a:ln>
+        </p:spPr>
+        <p:style>
+          <a:lnRef idx="2">
+            <a:schemeClr val="accent1"/>
+          </a:lnRef>
+          <a:fillRef idx="0">
+            <a:schemeClr val="accent1"/>
+          </a:fillRef>
+          <a:effectRef idx="0">
+            <a:schemeClr val="accent1"/>
+          </a:effectRef>
+          <a:fontRef idx="minor">
+            <a:schemeClr val="tx1"/>
+          </a:fontRef>
+        </p:style>
+      </p:cxnSp>
+      <p:sp>
+        <p:nvSpPr>
+          <p:cNvPr id="128" name="Rounded Rectangle 127"/>
+          <p:cNvSpPr/>
+          <p:nvPr/>
+        </p:nvSpPr>
+        <p:spPr>
+          <a:xfrm>
+            <a:off x="3904487" y="5715000"/>
+            <a:ext cx="2267712" cy="475488"/>
+          </a:xfrm>
+          <a:prstGeom prst="roundRect">
+            <a:avLst>
+              <a:gd name="adj" fmla="val 10000"/>
+            </a:avLst>
+          </a:prstGeom>
+          <a:solidFill>
+            <a:srgbClr val="FFF2CC"/>
+          </a:solidFill>
+          <a:ln w="21590">
+            <a:solidFill>
+              <a:srgbClr val="44546A"/>
+            </a:solidFill>
+          </a:ln>
+        </p:spPr>
+        <p:style>
+          <a:lnRef idx="1">
+            <a:schemeClr val="accent1"/>
+          </a:lnRef>
+          <a:fillRef idx="3">
+            <a:schemeClr val="accent1"/>
+          </a:fillRef>
+          <a:effectRef idx="0">
+            <a:schemeClr val="accent1"/>
+          </a:effectRef>
+          <a:fontRef idx="minor">
+            <a:schemeClr val="lt1"/>
+          </a:fontRef>
+        </p:style>
+        <p:txBody>
+          <a:bodyPr rtlCol="0" anchor="ctr" wrap="none" lIns="22860" rIns="22860"/>
+          <a:lstStyle/>
+          <a:p>
+            <a:pPr algn="ctr"/>
+            <a:r>
+              <a:rPr sz="2200" b="1">
+                <a:solidFill>
+                  <a:srgbClr val="000000"/>
+                </a:solidFill>
+                <a:latin typeface="Arial"/>
+              </a:rPr>
+              <a:t>Path 2 emb</a:t>
+            </a:r>
+          </a:p>
+        </p:txBody>
+      </p:sp>
+      <p:cxnSp>
+        <p:nvCxnSpPr>
+          <p:cNvPr id="129" name="Connector 128"/>
+          <p:cNvCxnSpPr/>
+          <p:nvPr/>
+        </p:nvCxnSpPr>
+        <p:spPr>
+          <a:xfrm>
+            <a:off x="3602736" y="5952744"/>
+            <a:ext cx="301751" cy="0"/>
+          </a:xfrm>
+          <a:prstGeom prst="line">
+            <a:avLst/>
+          </a:prstGeom>
+          <a:ln w="20320">
+            <a:solidFill>
+              <a:srgbClr val="44546A"/>
+            </a:solidFill>
+            <a:tailEnd type="triangle"/>
+          </a:ln>
+        </p:spPr>
+        <p:style>
+          <a:lnRef idx="2">
+            <a:schemeClr val="accent1"/>
+          </a:lnRef>
+          <a:fillRef idx="0">
+            <a:schemeClr val="accent1"/>
+          </a:fillRef>
+          <a:effectRef idx="0">
+            <a:schemeClr val="accent1"/>
+          </a:effectRef>
+          <a:fontRef idx="minor">
+            <a:schemeClr val="tx1"/>
+          </a:fontRef>
+        </p:style>
+      </p:cxnSp>
+      <p:sp>
+        <p:nvSpPr>
+          <p:cNvPr id="130" name="Rounded Rectangle 129"/>
+          <p:cNvSpPr/>
+          <p:nvPr/>
+        </p:nvSpPr>
+        <p:spPr>
+          <a:xfrm>
+            <a:off x="7607808" y="4325112"/>
+            <a:ext cx="1335024" cy="713232"/>
+          </a:xfrm>
+          <a:prstGeom prst="roundRect">
+            <a:avLst>
+              <a:gd name="adj" fmla="val 10000"/>
+            </a:avLst>
+          </a:prstGeom>
+          <a:solidFill>
+            <a:srgbClr val="F3F3F3"/>
+          </a:solidFill>
+          <a:ln w="21590">
+            <a:solidFill>
+              <a:srgbClr val="44546A"/>
+            </a:solidFill>
+          </a:ln>
+        </p:spPr>
+        <p:style>
+          <a:lnRef idx="1">
+            <a:schemeClr val="accent1"/>
+          </a:lnRef>
+          <a:fillRef idx="3">
+            <a:schemeClr val="accent1"/>
+          </a:fillRef>
+          <a:effectRef idx="0">
+            <a:schemeClr val="accent1"/>
+          </a:effectRef>
+          <a:fontRef idx="minor">
+            <a:schemeClr val="lt1"/>
+          </a:fontRef>
+        </p:style>
+        <p:txBody>
+          <a:bodyPr rtlCol="0" anchor="ctr" wrap="none" lIns="22860" rIns="22860"/>
+          <a:lstStyle/>
+          <a:p>
+            <a:pPr algn="ctr"/>
+            <a:r>
+              <a:rPr sz="2100" b="1">
+                <a:solidFill>
+                  <a:srgbClr val="000000"/>
+                </a:solidFill>
+                <a:latin typeface="Arial"/>
+              </a:rPr>
+              <a:t>Decoder</a:t>
             </a:r>
           </a:p>
         </p:txBody>
       </p:sp>
       <p:sp>
         <p:nvSpPr>
-          <p:cNvPr id="121" name="Rectangle 120"/>
+          <p:cNvPr id="131" name="Rounded Rectangle 130"/>
           <p:cNvSpPr/>
           <p:nvPr/>
         </p:nvSpPr>
         <p:spPr>
           <a:xfrm>
-            <a:off x="4014215" y="5513832"/>
-            <a:ext cx="3127248" cy="539496"/>
+            <a:off x="7607808" y="5605272"/>
+            <a:ext cx="1335024" cy="713232"/>
           </a:xfrm>
-          <a:prstGeom prst="rect">
-            <a:avLst/>
+          <a:prstGeom prst="roundRect">
+            <a:avLst>
+              <a:gd name="adj" fmla="val 10000"/>
+            </a:avLst>
           </a:prstGeom>
           <a:solidFill>
-            <a:srgbClr val="FFFFFF"/>
+            <a:srgbClr val="F3F3F3"/>
           </a:solidFill>
-          <a:ln w="22860">
+          <a:ln w="21590">
             <a:solidFill>
               <a:srgbClr val="44546A"/>
             </a:solidFill>
           </a:ln>
-          <a:effectLst/>
         </p:spPr>
         <p:style>
           <a:lnRef idx="1">
@@ -16884,36 +17290,282 @@
           </a:fontRef>
         </p:style>
         <p:txBody>
-          <a:bodyPr rtlCol="0" anchor="ctr" wrap="square" lIns="36576" rIns="36576"/>
+          <a:bodyPr rtlCol="0" anchor="ctr" wrap="none" lIns="22860" rIns="22860"/>
           <a:lstStyle/>
           <a:p>
-            <a:pPr algn="ctr">
-              <a:spcAft>
-                <a:spcPts val="100"/>
-              </a:spcAft>
-            </a:pPr>
+            <a:pPr algn="ctr"/>
             <a:r>
-              <a:rPr sz="1900" b="0">
+              <a:rPr sz="2100" b="1">
                 <a:solidFill>
                   <a:srgbClr val="000000"/>
                 </a:solidFill>
                 <a:latin typeface="Arial"/>
               </a:rPr>
-              <a:t>View B: different speakers</a:t>
+              <a:t>Decoder</a:t>
             </a:r>
           </a:p>
         </p:txBody>
       </p:sp>
+      <p:cxnSp>
+        <p:nvCxnSpPr>
+          <p:cNvPr id="132" name="Connector 131"/>
+          <p:cNvCxnSpPr/>
+          <p:nvPr/>
+        </p:nvCxnSpPr>
+        <p:spPr>
+          <a:xfrm>
+            <a:off x="6172200" y="4672584"/>
+            <a:ext cx="1435608" cy="0"/>
+          </a:xfrm>
+          <a:prstGeom prst="line">
+            <a:avLst/>
+          </a:prstGeom>
+          <a:ln w="20320">
+            <a:solidFill>
+              <a:srgbClr val="44546A"/>
+            </a:solidFill>
+            <a:tailEnd type="triangle"/>
+          </a:ln>
+        </p:spPr>
+        <p:style>
+          <a:lnRef idx="2">
+            <a:schemeClr val="accent1"/>
+          </a:lnRef>
+          <a:fillRef idx="0">
+            <a:schemeClr val="accent1"/>
+          </a:fillRef>
+          <a:effectRef idx="0">
+            <a:schemeClr val="accent1"/>
+          </a:effectRef>
+          <a:fontRef idx="minor">
+            <a:schemeClr val="tx1"/>
+          </a:fontRef>
+        </p:style>
+      </p:cxnSp>
+      <p:cxnSp>
+        <p:nvCxnSpPr>
+          <p:cNvPr id="133" name="Connector 132"/>
+          <p:cNvCxnSpPr/>
+          <p:nvPr/>
+        </p:nvCxnSpPr>
+        <p:spPr>
+          <a:xfrm>
+            <a:off x="6172200" y="5952744"/>
+            <a:ext cx="1435608" cy="0"/>
+          </a:xfrm>
+          <a:prstGeom prst="line">
+            <a:avLst/>
+          </a:prstGeom>
+          <a:ln w="20320">
+            <a:solidFill>
+              <a:srgbClr val="44546A"/>
+            </a:solidFill>
+            <a:tailEnd type="triangle"/>
+          </a:ln>
+        </p:spPr>
+        <p:style>
+          <a:lnRef idx="2">
+            <a:schemeClr val="accent1"/>
+          </a:lnRef>
+          <a:fillRef idx="0">
+            <a:schemeClr val="accent1"/>
+          </a:fillRef>
+          <a:effectRef idx="0">
+            <a:schemeClr val="accent1"/>
+          </a:effectRef>
+          <a:fontRef idx="minor">
+            <a:schemeClr val="tx1"/>
+          </a:fontRef>
+        </p:style>
+      </p:cxnSp>
+      <p:cxnSp>
+        <p:nvCxnSpPr>
+          <p:cNvPr id="134" name="Connector 133"/>
+          <p:cNvCxnSpPr/>
+          <p:nvPr/>
+        </p:nvCxnSpPr>
+        <p:spPr>
+          <a:xfrm>
+            <a:off x="6172200" y="5312664"/>
+            <a:ext cx="978408" cy="0"/>
+          </a:xfrm>
+          <a:prstGeom prst="line">
+            <a:avLst/>
+          </a:prstGeom>
+          <a:ln w="20320">
+            <a:solidFill>
+              <a:srgbClr val="44546A"/>
+            </a:solidFill>
+          </a:ln>
+        </p:spPr>
+        <p:style>
+          <a:lnRef idx="2">
+            <a:schemeClr val="accent1"/>
+          </a:lnRef>
+          <a:fillRef idx="0">
+            <a:schemeClr val="accent1"/>
+          </a:fillRef>
+          <a:effectRef idx="0">
+            <a:schemeClr val="accent1"/>
+          </a:effectRef>
+          <a:fontRef idx="minor">
+            <a:schemeClr val="tx1"/>
+          </a:fontRef>
+        </p:style>
+      </p:cxnSp>
+      <p:cxnSp>
+        <p:nvCxnSpPr>
+          <p:cNvPr id="135" name="Connector 134"/>
+          <p:cNvCxnSpPr/>
+          <p:nvPr/>
+        </p:nvCxnSpPr>
+        <p:spPr>
+          <a:xfrm>
+            <a:off x="7150608" y="4892040"/>
+            <a:ext cx="0" cy="868680"/>
+          </a:xfrm>
+          <a:prstGeom prst="line">
+            <a:avLst/>
+          </a:prstGeom>
+          <a:ln w="20320">
+            <a:solidFill>
+              <a:srgbClr val="44546A"/>
+            </a:solidFill>
+          </a:ln>
+        </p:spPr>
+        <p:style>
+          <a:lnRef idx="2">
+            <a:schemeClr val="accent1"/>
+          </a:lnRef>
+          <a:fillRef idx="0">
+            <a:schemeClr val="accent1"/>
+          </a:fillRef>
+          <a:effectRef idx="0">
+            <a:schemeClr val="accent1"/>
+          </a:effectRef>
+          <a:fontRef idx="minor">
+            <a:schemeClr val="tx1"/>
+          </a:fontRef>
+        </p:style>
+      </p:cxnSp>
+      <p:cxnSp>
+        <p:nvCxnSpPr>
+          <p:cNvPr id="136" name="Connector 135"/>
+          <p:cNvCxnSpPr/>
+          <p:nvPr/>
+        </p:nvCxnSpPr>
+        <p:spPr>
+          <a:xfrm>
+            <a:off x="7150608" y="4892040"/>
+            <a:ext cx="457200" cy="0"/>
+          </a:xfrm>
+          <a:prstGeom prst="line">
+            <a:avLst/>
+          </a:prstGeom>
+          <a:ln w="20320">
+            <a:solidFill>
+              <a:srgbClr val="44546A"/>
+            </a:solidFill>
+            <a:tailEnd type="triangle"/>
+          </a:ln>
+        </p:spPr>
+        <p:style>
+          <a:lnRef idx="2">
+            <a:schemeClr val="accent1"/>
+          </a:lnRef>
+          <a:fillRef idx="0">
+            <a:schemeClr val="accent1"/>
+          </a:fillRef>
+          <a:effectRef idx="0">
+            <a:schemeClr val="accent1"/>
+          </a:effectRef>
+          <a:fontRef idx="minor">
+            <a:schemeClr val="tx1"/>
+          </a:fontRef>
+        </p:style>
+      </p:cxnSp>
+      <p:cxnSp>
+        <p:nvCxnSpPr>
+          <p:cNvPr id="137" name="Connector 136"/>
+          <p:cNvCxnSpPr/>
+          <p:nvPr/>
+        </p:nvCxnSpPr>
+        <p:spPr>
+          <a:xfrm>
+            <a:off x="7150608" y="5760720"/>
+            <a:ext cx="457200" cy="0"/>
+          </a:xfrm>
+          <a:prstGeom prst="line">
+            <a:avLst/>
+          </a:prstGeom>
+          <a:ln w="20320">
+            <a:solidFill>
+              <a:srgbClr val="44546A"/>
+            </a:solidFill>
+            <a:tailEnd type="triangle"/>
+          </a:ln>
+        </p:spPr>
+        <p:style>
+          <a:lnRef idx="2">
+            <a:schemeClr val="accent1"/>
+          </a:lnRef>
+          <a:fillRef idx="0">
+            <a:schemeClr val="accent1"/>
+          </a:fillRef>
+          <a:effectRef idx="0">
+            <a:schemeClr val="accent1"/>
+          </a:effectRef>
+          <a:fontRef idx="minor">
+            <a:schemeClr val="tx1"/>
+          </a:fontRef>
+        </p:style>
+      </p:cxnSp>
+      <p:cxnSp>
+        <p:nvCxnSpPr>
+          <p:cNvPr id="138" name="Connector 137"/>
+          <p:cNvCxnSpPr/>
+          <p:nvPr/>
+        </p:nvCxnSpPr>
+        <p:spPr>
+          <a:xfrm>
+            <a:off x="8942832" y="4672584"/>
+            <a:ext cx="402336" cy="0"/>
+          </a:xfrm>
+          <a:prstGeom prst="line">
+            <a:avLst/>
+          </a:prstGeom>
+          <a:ln w="20320">
+            <a:solidFill>
+              <a:srgbClr val="44546A"/>
+            </a:solidFill>
+            <a:tailEnd type="triangle"/>
+          </a:ln>
+        </p:spPr>
+        <p:style>
+          <a:lnRef idx="2">
+            <a:schemeClr val="accent1"/>
+          </a:lnRef>
+          <a:fillRef idx="0">
+            <a:schemeClr val="accent1"/>
+          </a:fillRef>
+          <a:effectRef idx="0">
+            <a:schemeClr val="accent1"/>
+          </a:effectRef>
+          <a:fontRef idx="minor">
+            <a:schemeClr val="tx1"/>
+          </a:fontRef>
+        </p:style>
+      </p:cxnSp>
       <p:sp>
         <p:nvSpPr>
-          <p:cNvPr id="122" name="TextBox 121"/>
+          <p:cNvPr id="139" name="TextBox 138"/>
           <p:cNvSpPr txBox="1"/>
           <p:nvPr/>
         </p:nvSpPr>
         <p:spPr>
           <a:xfrm>
-            <a:off x="7452360" y="5486400"/>
-            <a:ext cx="4224528" cy="704088"/>
+            <a:off x="9464040" y="4453128"/>
+            <a:ext cx="1463040" cy="384048"/>
           </a:xfrm>
           <a:prstGeom prst="rect">
             <a:avLst/>
@@ -16921,54 +17573,74 @@
           <a:noFill/>
         </p:spPr>
         <p:txBody>
-          <a:bodyPr wrap="square" lIns="22860" rIns="22860" tIns="13716" bIns="13716">
+          <a:bodyPr wrap="none" lIns="18288" rIns="18288" tIns="9144" bIns="9144">
             <a:spAutoFit/>
           </a:bodyPr>
           <a:lstStyle/>
           <a:p>
             <a:pPr algn="l">
               <a:spcAft>
-                <a:spcPts val="300"/>
+                <a:spcPts val="200"/>
               </a:spcAft>
             </a:pPr>
             <a:r>
-              <a:rPr sz="1800" b="0">
+              <a:rPr sz="2400" b="1">
                 <a:solidFill>
                   <a:srgbClr val="000000"/>
                 </a:solidFill>
                 <a:latin typeface="Arial"/>
               </a:rPr>
-              <a:t>Fixed room, microphone, and RIR pair</a:t>
-            </a:r>
-          </a:p>
-          <a:p>
-            <a:pPr algn="l">
-              <a:spcAft>
-                <a:spcPts val="300"/>
-              </a:spcAft>
-            </a:pPr>
-            <a:r>
-              <a:rPr sz="1800" b="0">
-                <a:solidFill>
-                  <a:srgbClr val="000000"/>
-                </a:solidFill>
-                <a:latin typeface="Arial"/>
-              </a:rPr>
-              <a:t>Add Lroom and Lpath during training</a:t>
+              <a:t>CTF 1</a:t>
             </a:r>
           </a:p>
         </p:txBody>
       </p:sp>
+      <p:cxnSp>
+        <p:nvCxnSpPr>
+          <p:cNvPr id="140" name="Connector 139"/>
+          <p:cNvCxnSpPr/>
+          <p:nvPr/>
+        </p:nvCxnSpPr>
+        <p:spPr>
+          <a:xfrm>
+            <a:off x="8942832" y="5952744"/>
+            <a:ext cx="402336" cy="0"/>
+          </a:xfrm>
+          <a:prstGeom prst="line">
+            <a:avLst/>
+          </a:prstGeom>
+          <a:ln w="20320">
+            <a:solidFill>
+              <a:srgbClr val="44546A"/>
+            </a:solidFill>
+            <a:tailEnd type="triangle"/>
+          </a:ln>
+        </p:spPr>
+        <p:style>
+          <a:lnRef idx="2">
+            <a:schemeClr val="accent1"/>
+          </a:lnRef>
+          <a:fillRef idx="0">
+            <a:schemeClr val="accent1"/>
+          </a:fillRef>
+          <a:effectRef idx="0">
+            <a:schemeClr val="accent1"/>
+          </a:effectRef>
+          <a:fontRef idx="minor">
+            <a:schemeClr val="tx1"/>
+          </a:fontRef>
+        </p:style>
+      </p:cxnSp>
       <p:sp>
         <p:nvSpPr>
-          <p:cNvPr id="123" name="TextBox 122"/>
+          <p:cNvPr id="141" name="TextBox 140"/>
           <p:cNvSpPr txBox="1"/>
           <p:nvPr/>
         </p:nvSpPr>
         <p:spPr>
           <a:xfrm>
-            <a:off x="603504" y="6327648"/>
-            <a:ext cx="10058400" cy="265176"/>
+            <a:off x="9464040" y="5733288"/>
+            <a:ext cx="1463040" cy="384048"/>
           </a:xfrm>
           <a:prstGeom prst="rect">
             <a:avLst/>
@@ -16976,24 +17648,413 @@
           <a:noFill/>
         </p:spPr>
         <p:txBody>
-          <a:bodyPr wrap="square" lIns="22860" rIns="22860" tIns="13716" bIns="13716">
+          <a:bodyPr wrap="none" lIns="18288" rIns="18288" tIns="9144" bIns="9144">
             <a:spAutoFit/>
           </a:bodyPr>
           <a:lstStyle/>
           <a:p>
             <a:pPr algn="l">
               <a:spcAft>
-                <a:spcPts val="300"/>
+                <a:spcPts val="200"/>
+              </a:spcAft>
+            </a:pPr>
+            <a:r>
+              <a:rPr sz="2400" b="1">
+                <a:solidFill>
+                  <a:srgbClr val="000000"/>
+                </a:solidFill>
+                <a:latin typeface="Arial"/>
+              </a:rPr>
+              <a:t>CTF 2</a:t>
+            </a:r>
+          </a:p>
+        </p:txBody>
+      </p:sp>
+      <p:sp>
+        <p:nvSpPr>
+          <p:cNvPr id="142" name="TextBox 141"/>
+          <p:cNvSpPr txBox="1"/>
+          <p:nvPr/>
+        </p:nvSpPr>
+        <p:spPr>
+          <a:xfrm>
+            <a:off x="1874519" y="3886200"/>
+            <a:ext cx="2011680" cy="283464"/>
+          </a:xfrm>
+          <a:prstGeom prst="rect">
+            <a:avLst/>
+          </a:prstGeom>
+          <a:noFill/>
+        </p:spPr>
+        <p:txBody>
+          <a:bodyPr wrap="none" lIns="18288" rIns="18288" tIns="9144" bIns="9144">
+            <a:spAutoFit/>
+          </a:bodyPr>
+          <a:lstStyle/>
+          <a:p>
+            <a:pPr algn="ctr">
+              <a:spcAft>
+                <a:spcPts val="200"/>
+              </a:spcAft>
+            </a:pPr>
+            <a:r>
+              <a:rPr sz="1500" b="0">
+                <a:solidFill>
+                  <a:srgbClr val="777777"/>
+                </a:solidFill>
+                <a:latin typeface="Noto Sans CJK JP"/>
+              </a:rPr>
+              <a:t>同じモデル</a:t>
+            </a:r>
+          </a:p>
+        </p:txBody>
+      </p:sp>
+      <p:cxnSp>
+        <p:nvCxnSpPr>
+          <p:cNvPr id="143" name="Connector 142"/>
+          <p:cNvCxnSpPr/>
+          <p:nvPr/>
+        </p:nvCxnSpPr>
+        <p:spPr>
+          <a:xfrm>
+            <a:off x="6172200" y="2798064"/>
+            <a:ext cx="374904" cy="0"/>
+          </a:xfrm>
+          <a:prstGeom prst="line">
+            <a:avLst/>
+          </a:prstGeom>
+          <a:ln w="33020">
+            <a:solidFill>
+              <a:srgbClr val="4B8057"/>
+            </a:solidFill>
+            <a:prstDash val="dash"/>
+          </a:ln>
+        </p:spPr>
+        <p:style>
+          <a:lnRef idx="2">
+            <a:schemeClr val="accent1"/>
+          </a:lnRef>
+          <a:fillRef idx="0">
+            <a:schemeClr val="accent1"/>
+          </a:fillRef>
+          <a:effectRef idx="0">
+            <a:schemeClr val="accent1"/>
+          </a:effectRef>
+          <a:fontRef idx="minor">
+            <a:schemeClr val="tx1"/>
+          </a:fontRef>
+        </p:style>
+      </p:cxnSp>
+      <p:cxnSp>
+        <p:nvCxnSpPr>
+          <p:cNvPr id="144" name="Connector 143"/>
+          <p:cNvCxnSpPr/>
+          <p:nvPr/>
+        </p:nvCxnSpPr>
+        <p:spPr>
+          <a:xfrm>
+            <a:off x="6547104" y="2798064"/>
+            <a:ext cx="0" cy="1106423"/>
+          </a:xfrm>
+          <a:prstGeom prst="line">
+            <a:avLst/>
+          </a:prstGeom>
+          <a:ln w="33020">
+            <a:solidFill>
+              <a:srgbClr val="4B8057"/>
+            </a:solidFill>
+            <a:prstDash val="dash"/>
+          </a:ln>
+        </p:spPr>
+        <p:style>
+          <a:lnRef idx="2">
+            <a:schemeClr val="accent1"/>
+          </a:lnRef>
+          <a:fillRef idx="0">
+            <a:schemeClr val="accent1"/>
+          </a:fillRef>
+          <a:effectRef idx="0">
+            <a:schemeClr val="accent1"/>
+          </a:effectRef>
+          <a:fontRef idx="minor">
+            <a:schemeClr val="tx1"/>
+          </a:fontRef>
+        </p:style>
+      </p:cxnSp>
+      <p:cxnSp>
+        <p:nvCxnSpPr>
+          <p:cNvPr id="145" name="Connector 144"/>
+          <p:cNvCxnSpPr/>
+          <p:nvPr/>
+        </p:nvCxnSpPr>
+        <p:spPr>
+          <a:xfrm>
+            <a:off x="6172200" y="5312664"/>
+            <a:ext cx="374904" cy="0"/>
+          </a:xfrm>
+          <a:prstGeom prst="line">
+            <a:avLst/>
+          </a:prstGeom>
+          <a:ln w="33020">
+            <a:solidFill>
+              <a:srgbClr val="4B8057"/>
+            </a:solidFill>
+            <a:prstDash val="dash"/>
+          </a:ln>
+        </p:spPr>
+        <p:style>
+          <a:lnRef idx="2">
+            <a:schemeClr val="accent1"/>
+          </a:lnRef>
+          <a:fillRef idx="0">
+            <a:schemeClr val="accent1"/>
+          </a:fillRef>
+          <a:effectRef idx="0">
+            <a:schemeClr val="accent1"/>
+          </a:effectRef>
+          <a:fontRef idx="minor">
+            <a:schemeClr val="tx1"/>
+          </a:fontRef>
+        </p:style>
+      </p:cxnSp>
+      <p:cxnSp>
+        <p:nvCxnSpPr>
+          <p:cNvPr id="146" name="Connector 145"/>
+          <p:cNvCxnSpPr/>
+          <p:nvPr/>
+        </p:nvCxnSpPr>
+        <p:spPr>
+          <a:xfrm flipV="1">
+            <a:off x="6547104" y="4105656"/>
+            <a:ext cx="0" cy="1207008"/>
+          </a:xfrm>
+          <a:prstGeom prst="line">
+            <a:avLst/>
+          </a:prstGeom>
+          <a:ln w="33020">
+            <a:solidFill>
+              <a:srgbClr val="4B8057"/>
+            </a:solidFill>
+            <a:prstDash val="dash"/>
+          </a:ln>
+        </p:spPr>
+        <p:style>
+          <a:lnRef idx="2">
+            <a:schemeClr val="accent1"/>
+          </a:lnRef>
+          <a:fillRef idx="0">
+            <a:schemeClr val="accent1"/>
+          </a:fillRef>
+          <a:effectRef idx="0">
+            <a:schemeClr val="accent1"/>
+          </a:effectRef>
+          <a:fontRef idx="minor">
+            <a:schemeClr val="tx1"/>
+          </a:fontRef>
+        </p:style>
+      </p:cxnSp>
+      <p:cxnSp>
+        <p:nvCxnSpPr>
+          <p:cNvPr id="147" name="Connector 146"/>
+          <p:cNvCxnSpPr/>
+          <p:nvPr/>
+        </p:nvCxnSpPr>
+        <p:spPr>
+          <a:xfrm>
+            <a:off x="6547104" y="3904487"/>
+            <a:ext cx="1042416" cy="0"/>
+          </a:xfrm>
+          <a:prstGeom prst="line">
+            <a:avLst/>
+          </a:prstGeom>
+          <a:ln w="33020">
+            <a:solidFill>
+              <a:srgbClr val="4B8057"/>
+            </a:solidFill>
+            <a:prstDash val="dash"/>
+          </a:ln>
+        </p:spPr>
+        <p:style>
+          <a:lnRef idx="2">
+            <a:schemeClr val="accent1"/>
+          </a:lnRef>
+          <a:fillRef idx="0">
+            <a:schemeClr val="accent1"/>
+          </a:fillRef>
+          <a:effectRef idx="0">
+            <a:schemeClr val="accent1"/>
+          </a:effectRef>
+          <a:fontRef idx="minor">
+            <a:schemeClr val="tx1"/>
+          </a:fontRef>
+        </p:style>
+      </p:cxnSp>
+      <p:cxnSp>
+        <p:nvCxnSpPr>
+          <p:cNvPr id="148" name="Connector 147"/>
+          <p:cNvCxnSpPr/>
+          <p:nvPr/>
+        </p:nvCxnSpPr>
+        <p:spPr>
+          <a:xfrm>
+            <a:off x="6547104" y="4105656"/>
+            <a:ext cx="1042416" cy="0"/>
+          </a:xfrm>
+          <a:prstGeom prst="line">
+            <a:avLst/>
+          </a:prstGeom>
+          <a:ln w="33020">
+            <a:solidFill>
+              <a:srgbClr val="4B8057"/>
+            </a:solidFill>
+            <a:prstDash val="dash"/>
+          </a:ln>
+        </p:spPr>
+        <p:style>
+          <a:lnRef idx="2">
+            <a:schemeClr val="accent1"/>
+          </a:lnRef>
+          <a:fillRef idx="0">
+            <a:schemeClr val="accent1"/>
+          </a:fillRef>
+          <a:effectRef idx="0">
+            <a:schemeClr val="accent1"/>
+          </a:effectRef>
+          <a:fontRef idx="minor">
+            <a:schemeClr val="tx1"/>
+          </a:fontRef>
+        </p:style>
+      </p:cxnSp>
+      <p:sp>
+        <p:nvSpPr>
+          <p:cNvPr id="149" name="Rounded Rectangle 148"/>
+          <p:cNvSpPr/>
+          <p:nvPr/>
+        </p:nvSpPr>
+        <p:spPr>
+          <a:xfrm>
+            <a:off x="7653527" y="3858768"/>
+            <a:ext cx="3310128" cy="402336"/>
+          </a:xfrm>
+          <a:prstGeom prst="roundRect">
+            <a:avLst>
+              <a:gd name="adj" fmla="val 10000"/>
+            </a:avLst>
+          </a:prstGeom>
+          <a:solidFill>
+            <a:srgbClr val="D9EAD3"/>
+          </a:solidFill>
+          <a:ln w="21590">
+            <a:solidFill>
+              <a:srgbClr val="4B8057"/>
+            </a:solidFill>
+          </a:ln>
+        </p:spPr>
+        <p:style>
+          <a:lnRef idx="1">
+            <a:schemeClr val="accent1"/>
+          </a:lnRef>
+          <a:fillRef idx="3">
+            <a:schemeClr val="accent1"/>
+          </a:fillRef>
+          <a:effectRef idx="0">
+            <a:schemeClr val="accent1"/>
+          </a:effectRef>
+          <a:fontRef idx="minor">
+            <a:schemeClr val="lt1"/>
+          </a:fontRef>
+        </p:style>
+        <p:txBody>
+          <a:bodyPr rtlCol="0" anchor="ctr" wrap="none" lIns="22860" rIns="22860"/>
+          <a:lstStyle/>
+          <a:p>
+            <a:pPr algn="ctr"/>
+            <a:r>
+              <a:rPr sz="1900" b="1">
+                <a:solidFill>
+                  <a:srgbClr val="000000"/>
+                </a:solidFill>
+                <a:latin typeface="Noto Sans CJK JP"/>
+              </a:rPr>
+              <a:t>同じ部屋 → 近づける</a:t>
+            </a:r>
+          </a:p>
+        </p:txBody>
+      </p:sp>
+      <p:sp>
+        <p:nvSpPr>
+          <p:cNvPr id="150" name="TextBox 149"/>
+          <p:cNvSpPr txBox="1"/>
+          <p:nvPr/>
+        </p:nvSpPr>
+        <p:spPr>
+          <a:xfrm>
+            <a:off x="594360" y="6400800"/>
+            <a:ext cx="10332720" cy="265176"/>
+          </a:xfrm>
+          <a:prstGeom prst="rect">
+            <a:avLst/>
+          </a:prstGeom>
+          <a:noFill/>
+        </p:spPr>
+        <p:txBody>
+          <a:bodyPr wrap="none" lIns="18288" rIns="18288" tIns="9144" bIns="9144">
+            <a:spAutoFit/>
+          </a:bodyPr>
+          <a:lstStyle/>
+          <a:p>
+            <a:pPr algn="l">
+              <a:spcAft>
+                <a:spcPts val="200"/>
+              </a:spcAft>
+            </a:pPr>
+            <a:r>
+              <a:rPr sz="1600" b="0">
+                <a:solidFill>
+                  <a:srgbClr val="666666"/>
+                </a:solidFill>
+                <a:latin typeface="Noto Sans CJK JP"/>
+              </a:rPr>
+              <a:t>別のデータ条件は離す</a:t>
+            </a:r>
+          </a:p>
+        </p:txBody>
+      </p:sp>
+      <p:sp>
+        <p:nvSpPr>
+          <p:cNvPr id="151" name="TextBox 150"/>
+          <p:cNvSpPr txBox="1"/>
+          <p:nvPr/>
+        </p:nvSpPr>
+        <p:spPr>
+          <a:xfrm>
+            <a:off x="10927080" y="6400800"/>
+            <a:ext cx="365760" cy="246888"/>
+          </a:xfrm>
+          <a:prstGeom prst="rect">
+            <a:avLst/>
+          </a:prstGeom>
+          <a:noFill/>
+        </p:spPr>
+        <p:txBody>
+          <a:bodyPr wrap="none" lIns="18288" rIns="18288" tIns="9144" bIns="9144">
+            <a:spAutoFit/>
+          </a:bodyPr>
+          <a:lstStyle/>
+          <a:p>
+            <a:pPr algn="r">
+              <a:spcAft>
+                <a:spcPts val="200"/>
               </a:spcAft>
             </a:pPr>
             <a:r>
               <a:rPr sz="1200" b="0">
                 <a:solidFill>
-                  <a:srgbClr val="666666"/>
+                  <a:srgbClr val="888888"/>
                 </a:solidFill>
                 <a:latin typeface="Arial"/>
               </a:rPr>
-              <a:t>Same physical paths across views; room/path labels denote the feature-sharing structure.</a:t>
+              <a:t>1</a:t>
             </a:r>
           </a:p>
         </p:txBody>
@@ -17039,8 +18100,8 @@
         </p:nvSpPr>
         <p:spPr>
           <a:xfrm>
-            <a:off x="347472" y="512064"/>
-            <a:ext cx="11430000" cy="594360"/>
+            <a:off x="365760" y="475488"/>
+            <a:ext cx="10972800" cy="640080"/>
           </a:xfrm>
           <a:prstGeom prst="rect">
             <a:avLst/>
@@ -17048,14 +18109,14 @@
           <a:noFill/>
         </p:spPr>
         <p:txBody>
-          <a:bodyPr wrap="square" lIns="22860" rIns="22860" tIns="13716" bIns="13716">
+          <a:bodyPr wrap="none" lIns="18288" rIns="18288" tIns="9144" bIns="9144">
             <a:spAutoFit/>
           </a:bodyPr>
           <a:lstStyle/>
           <a:p>
             <a:pPr algn="l">
               <a:spcAft>
-                <a:spcPts val="300"/>
+                <a:spcPts val="200"/>
               </a:spcAft>
             </a:pPr>
             <a:r>
@@ -17065,7 +18126,7 @@
                 </a:solidFill>
                 <a:latin typeface="Arial"/>
               </a:rPr>
-              <a:t>Contrastive Losses: Lroom and Lpath</a:t>
+              <a:t>Lpath</a:t>
             </a:r>
           </a:p>
         </p:txBody>
@@ -17078,8 +18139,8 @@
         </p:nvSpPr>
         <p:spPr>
           <a:xfrm>
-            <a:off x="10835640" y="6409944"/>
-            <a:ext cx="521207" cy="246888"/>
+            <a:off x="594360" y="1197864"/>
+            <a:ext cx="10972800" cy="457200"/>
           </a:xfrm>
           <a:prstGeom prst="rect">
             <a:avLst/>
@@ -17087,24 +18148,24 @@
           <a:noFill/>
         </p:spPr>
         <p:txBody>
-          <a:bodyPr wrap="square" lIns="22860" rIns="22860" tIns="13716" bIns="13716">
+          <a:bodyPr wrap="none" lIns="18288" rIns="18288" tIns="9144" bIns="9144">
             <a:spAutoFit/>
           </a:bodyPr>
           <a:lstStyle/>
           <a:p>
-            <a:pPr algn="r">
-              <a:spcAft>
-                <a:spcPts val="300"/>
+            <a:pPr algn="l">
+              <a:spcAft>
+                <a:spcPts val="200"/>
               </a:spcAft>
             </a:pPr>
             <a:r>
-              <a:rPr sz="1200" b="0">
-                <a:solidFill>
-                  <a:srgbClr val="888888"/>
-                </a:solidFill>
-                <a:latin typeface="Arial"/>
+              <a:rPr sz="2400" b="0">
+                <a:solidFill>
+                  <a:srgbClr val="000000"/>
+                </a:solidFill>
+                <a:latin typeface="Noto Sans CJK JP"/>
               </a:rPr>
-              <a:t>2</a:t>
+              <a:t>部屋・配置は同じ。話者・発話だけ替える。</a:t>
             </a:r>
           </a:p>
         </p:txBody>
@@ -17117,8 +18178,8 @@
         </p:nvSpPr>
         <p:spPr>
           <a:xfrm>
-            <a:off x="594360" y="1271016"/>
-            <a:ext cx="10972800" cy="384048"/>
+            <a:off x="530352" y="2249424"/>
+            <a:ext cx="1234440" cy="347472"/>
           </a:xfrm>
           <a:prstGeom prst="rect">
             <a:avLst/>
@@ -17126,24 +18187,24 @@
           <a:noFill/>
         </p:spPr>
         <p:txBody>
-          <a:bodyPr wrap="square" lIns="22860" rIns="22860" tIns="13716" bIns="13716">
+          <a:bodyPr wrap="none" lIns="18288" rIns="18288" tIns="9144" bIns="9144">
             <a:spAutoFit/>
           </a:bodyPr>
           <a:lstStyle/>
           <a:p>
-            <a:pPr algn="l">
-              <a:spcAft>
-                <a:spcPts val="300"/>
+            <a:pPr algn="ctr">
+              <a:spcAft>
+                <a:spcPts val="200"/>
               </a:spcAft>
             </a:pPr>
             <a:r>
-              <a:rPr sz="2100" b="0">
+              <a:rPr sz="2300" b="1">
                 <a:solidFill>
                   <a:srgbClr val="000000"/>
                 </a:solidFill>
                 <a:latin typeface="Arial"/>
               </a:rPr>
-              <a:t>Positive: same acoustic condition across views     Negative: a different condition / path</a:t>
+              <a:t>Data A</a:t>
             </a:r>
           </a:p>
         </p:txBody>
@@ -17156,8 +18217,8 @@
         </p:nvSpPr>
         <p:spPr>
           <a:xfrm>
-            <a:off x="658368" y="1847088"/>
-            <a:ext cx="5166360" cy="356616"/>
+            <a:off x="457200" y="2642616"/>
+            <a:ext cx="1371600" cy="329184"/>
           </a:xfrm>
           <a:prstGeom prst="rect">
             <a:avLst/>
@@ -17165,63 +18226,80 @@
           <a:noFill/>
         </p:spPr>
         <p:txBody>
-          <a:bodyPr wrap="square" lIns="22860" rIns="22860" tIns="13716" bIns="13716">
+          <a:bodyPr wrap="none" lIns="18288" rIns="18288" tIns="9144" bIns="9144">
             <a:spAutoFit/>
           </a:bodyPr>
           <a:lstStyle/>
           <a:p>
-            <a:pPr algn="l">
-              <a:spcAft>
-                <a:spcPts val="300"/>
+            <a:pPr algn="ctr">
+              <a:spcAft>
+                <a:spcPts val="200"/>
               </a:spcAft>
             </a:pPr>
             <a:r>
-              <a:rPr sz="2400" b="1">
+              <a:rPr sz="1700" b="0">
                 <a:solidFill>
                   <a:srgbClr val="000000"/>
                 </a:solidFill>
-                <a:latin typeface="Arial"/>
+                <a:latin typeface="Noto Sans CJK JP"/>
               </a:rPr>
-              <a:t>Lroom: shared room features</a:t>
+              <a:t>話者 1 + 2</a:t>
             </a:r>
           </a:p>
         </p:txBody>
       </p:sp>
       <p:sp>
         <p:nvSpPr>
-          <p:cNvPr id="110" name="TextBox 109"/>
-          <p:cNvSpPr txBox="1"/>
+          <p:cNvPr id="110" name="Rounded Rectangle 109"/>
+          <p:cNvSpPr/>
           <p:nvPr/>
         </p:nvSpPr>
         <p:spPr>
           <a:xfrm>
-            <a:off x="6409944" y="1847088"/>
-            <a:ext cx="5212080" cy="356616"/>
+            <a:off x="2029968" y="1920240"/>
+            <a:ext cx="1280160" cy="1755648"/>
           </a:xfrm>
-          <a:prstGeom prst="rect">
-            <a:avLst/>
+          <a:prstGeom prst="roundRect">
+            <a:avLst>
+              <a:gd name="adj" fmla="val 10000"/>
+            </a:avLst>
           </a:prstGeom>
-          <a:noFill/>
+          <a:solidFill>
+            <a:srgbClr val="F3F3F3"/>
+          </a:solidFill>
+          <a:ln w="21590">
+            <a:solidFill>
+              <a:srgbClr val="44546A"/>
+            </a:solidFill>
+          </a:ln>
         </p:spPr>
+        <p:style>
+          <a:lnRef idx="1">
+            <a:schemeClr val="accent1"/>
+          </a:lnRef>
+          <a:fillRef idx="3">
+            <a:schemeClr val="accent1"/>
+          </a:fillRef>
+          <a:effectRef idx="0">
+            <a:schemeClr val="accent1"/>
+          </a:effectRef>
+          <a:fontRef idx="minor">
+            <a:schemeClr val="lt1"/>
+          </a:fontRef>
+        </p:style>
         <p:txBody>
-          <a:bodyPr wrap="square" lIns="22860" rIns="22860" tIns="13716" bIns="13716">
-            <a:spAutoFit/>
-          </a:bodyPr>
+          <a:bodyPr rtlCol="0" anchor="ctr" wrap="none" lIns="22860" rIns="22860"/>
           <a:lstStyle/>
           <a:p>
-            <a:pPr algn="l">
-              <a:spcAft>
-                <a:spcPts val="300"/>
-              </a:spcAft>
-            </a:pPr>
+            <a:pPr algn="ctr"/>
             <a:r>
-              <a:rPr sz="2400" b="1">
+              <a:rPr sz="2200" b="1">
                 <a:solidFill>
                   <a:srgbClr val="000000"/>
                 </a:solidFill>
                 <a:latin typeface="Arial"/>
               </a:rPr>
-              <a:t>Lpath: path-specific features</a:t>
+              <a:t>Encoder</a:t>
             </a:r>
           </a:p>
         </p:txBody>
@@ -17234,18 +18312,18 @@
         </p:nvCxnSpPr>
         <p:spPr>
           <a:xfrm>
-            <a:off x="6089904" y="1892807"/>
-            <a:ext cx="0" cy="3483865"/>
+            <a:off x="1783080" y="2798064"/>
+            <a:ext cx="246888" cy="0"/>
           </a:xfrm>
           <a:prstGeom prst="line">
             <a:avLst/>
           </a:prstGeom>
-          <a:ln w="12700">
+          <a:ln w="20320">
             <a:solidFill>
-              <a:srgbClr val="D9D9D9"/>
+              <a:srgbClr val="44546A"/>
             </a:solidFill>
+            <a:tailEnd type="triangle"/>
           </a:ln>
-          <a:effectLst/>
         </p:spPr>
         <p:style>
           <a:lnRef idx="2">
@@ -17254,7 +18332,77 @@
           <a:fillRef idx="0">
             <a:schemeClr val="accent1"/>
           </a:fillRef>
-          <a:effectRef idx="1">
+          <a:effectRef idx="0">
+            <a:schemeClr val="accent1"/>
+          </a:effectRef>
+          <a:fontRef idx="minor">
+            <a:schemeClr val="tx1"/>
+          </a:fontRef>
+        </p:style>
+      </p:cxnSp>
+      <p:cxnSp>
+        <p:nvCxnSpPr>
+          <p:cNvPr id="112" name="Connector 111"/>
+          <p:cNvCxnSpPr/>
+          <p:nvPr/>
+        </p:nvCxnSpPr>
+        <p:spPr>
+          <a:xfrm>
+            <a:off x="3310128" y="2798064"/>
+            <a:ext cx="292608" cy="0"/>
+          </a:xfrm>
+          <a:prstGeom prst="line">
+            <a:avLst/>
+          </a:prstGeom>
+          <a:ln w="20320">
+            <a:solidFill>
+              <a:srgbClr val="44546A"/>
+            </a:solidFill>
+          </a:ln>
+        </p:spPr>
+        <p:style>
+          <a:lnRef idx="2">
+            <a:schemeClr val="accent1"/>
+          </a:lnRef>
+          <a:fillRef idx="0">
+            <a:schemeClr val="accent1"/>
+          </a:fillRef>
+          <a:effectRef idx="0">
+            <a:schemeClr val="accent1"/>
+          </a:effectRef>
+          <a:fontRef idx="minor">
+            <a:schemeClr val="tx1"/>
+          </a:fontRef>
+        </p:style>
+      </p:cxnSp>
+      <p:cxnSp>
+        <p:nvCxnSpPr>
+          <p:cNvPr id="113" name="Connector 112"/>
+          <p:cNvCxnSpPr/>
+          <p:nvPr/>
+        </p:nvCxnSpPr>
+        <p:spPr>
+          <a:xfrm>
+            <a:off x="3602736" y="2157984"/>
+            <a:ext cx="0" cy="1280160"/>
+          </a:xfrm>
+          <a:prstGeom prst="line">
+            <a:avLst/>
+          </a:prstGeom>
+          <a:ln w="20320">
+            <a:solidFill>
+              <a:srgbClr val="44546A"/>
+            </a:solidFill>
+          </a:ln>
+        </p:spPr>
+        <p:style>
+          <a:lnRef idx="2">
+            <a:schemeClr val="accent1"/>
+          </a:lnRef>
+          <a:fillRef idx="0">
+            <a:schemeClr val="accent1"/>
+          </a:fillRef>
+          <a:effectRef idx="0">
             <a:schemeClr val="accent1"/>
           </a:effectRef>
           <a:fontRef idx="minor">
@@ -17264,183 +18412,28 @@
       </p:cxnSp>
       <p:sp>
         <p:nvSpPr>
-          <p:cNvPr id="112" name="TextBox 111"/>
-          <p:cNvSpPr txBox="1"/>
-          <p:nvPr/>
-        </p:nvSpPr>
-        <p:spPr>
-          <a:xfrm>
-            <a:off x="941832" y="2340864"/>
-            <a:ext cx="1444752" cy="301752"/>
-          </a:xfrm>
-          <a:prstGeom prst="rect">
-            <a:avLst/>
-          </a:prstGeom>
-          <a:noFill/>
-        </p:spPr>
-        <p:txBody>
-          <a:bodyPr wrap="square" lIns="22860" rIns="22860" tIns="13716" bIns="13716">
-            <a:spAutoFit/>
-          </a:bodyPr>
-          <a:lstStyle/>
-          <a:p>
-            <a:pPr algn="ctr">
-              <a:spcAft>
-                <a:spcPts val="300"/>
-              </a:spcAft>
-            </a:pPr>
-            <a:r>
-              <a:rPr sz="1800" b="0">
-                <a:solidFill>
-                  <a:srgbClr val="000000"/>
-                </a:solidFill>
-                <a:latin typeface="Arial"/>
-              </a:rPr>
-              <a:t>View A</a:t>
-            </a:r>
-          </a:p>
-        </p:txBody>
-      </p:sp>
-      <p:sp>
-        <p:nvSpPr>
-          <p:cNvPr id="113" name="TextBox 112"/>
-          <p:cNvSpPr txBox="1"/>
-          <p:nvPr/>
-        </p:nvSpPr>
-        <p:spPr>
-          <a:xfrm>
-            <a:off x="3776472" y="2340864"/>
-            <a:ext cx="1444752" cy="301752"/>
-          </a:xfrm>
-          <a:prstGeom prst="rect">
-            <a:avLst/>
-          </a:prstGeom>
-          <a:noFill/>
-        </p:spPr>
-        <p:txBody>
-          <a:bodyPr wrap="square" lIns="22860" rIns="22860" tIns="13716" bIns="13716">
-            <a:spAutoFit/>
-          </a:bodyPr>
-          <a:lstStyle/>
-          <a:p>
-            <a:pPr algn="ctr">
-              <a:spcAft>
-                <a:spcPts val="300"/>
-              </a:spcAft>
-            </a:pPr>
-            <a:r>
-              <a:rPr sz="1800" b="0">
-                <a:solidFill>
-                  <a:srgbClr val="000000"/>
-                </a:solidFill>
-                <a:latin typeface="Arial"/>
-              </a:rPr>
-              <a:t>View B</a:t>
-            </a:r>
-          </a:p>
-        </p:txBody>
-      </p:sp>
-      <p:sp>
-        <p:nvSpPr>
-          <p:cNvPr id="114" name="TextBox 113"/>
-          <p:cNvSpPr txBox="1"/>
-          <p:nvPr/>
-        </p:nvSpPr>
-        <p:spPr>
-          <a:xfrm>
-            <a:off x="6684264" y="2340864"/>
-            <a:ext cx="1444752" cy="301752"/>
-          </a:xfrm>
-          <a:prstGeom prst="rect">
-            <a:avLst/>
-          </a:prstGeom>
-          <a:noFill/>
-        </p:spPr>
-        <p:txBody>
-          <a:bodyPr wrap="square" lIns="22860" rIns="22860" tIns="13716" bIns="13716">
-            <a:spAutoFit/>
-          </a:bodyPr>
-          <a:lstStyle/>
-          <a:p>
-            <a:pPr algn="ctr">
-              <a:spcAft>
-                <a:spcPts val="300"/>
-              </a:spcAft>
-            </a:pPr>
-            <a:r>
-              <a:rPr sz="1800" b="0">
-                <a:solidFill>
-                  <a:srgbClr val="000000"/>
-                </a:solidFill>
-                <a:latin typeface="Arial"/>
-              </a:rPr>
-              <a:t>View A</a:t>
-            </a:r>
-          </a:p>
-        </p:txBody>
-      </p:sp>
-      <p:sp>
-        <p:nvSpPr>
-          <p:cNvPr id="115" name="TextBox 114"/>
-          <p:cNvSpPr txBox="1"/>
-          <p:nvPr/>
-        </p:nvSpPr>
-        <p:spPr>
-          <a:xfrm>
-            <a:off x="9518904" y="2340864"/>
-            <a:ext cx="1444752" cy="301752"/>
-          </a:xfrm>
-          <a:prstGeom prst="rect">
-            <a:avLst/>
-          </a:prstGeom>
-          <a:noFill/>
-        </p:spPr>
-        <p:txBody>
-          <a:bodyPr wrap="square" lIns="22860" rIns="22860" tIns="13716" bIns="13716">
-            <a:spAutoFit/>
-          </a:bodyPr>
-          <a:lstStyle/>
-          <a:p>
-            <a:pPr algn="ctr">
-              <a:spcAft>
-                <a:spcPts val="300"/>
-              </a:spcAft>
-            </a:pPr>
-            <a:r>
-              <a:rPr sz="1800" b="0">
-                <a:solidFill>
-                  <a:srgbClr val="000000"/>
-                </a:solidFill>
-                <a:latin typeface="Arial"/>
-              </a:rPr>
-              <a:t>View B</a:t>
-            </a:r>
-          </a:p>
-        </p:txBody>
-      </p:sp>
-      <p:sp>
-        <p:nvSpPr>
-          <p:cNvPr id="116" name="Rectangle 115"/>
+          <p:cNvPr id="114" name="Rounded Rectangle 113"/>
           <p:cNvSpPr/>
           <p:nvPr/>
         </p:nvSpPr>
         <p:spPr>
           <a:xfrm>
-            <a:off x="932688" y="2779776"/>
-            <a:ext cx="1527048" cy="585216"/>
+            <a:off x="3904487" y="1920240"/>
+            <a:ext cx="2267712" cy="475488"/>
           </a:xfrm>
-          <a:prstGeom prst="rect">
-            <a:avLst/>
+          <a:prstGeom prst="roundRect">
+            <a:avLst>
+              <a:gd name="adj" fmla="val 10000"/>
+            </a:avLst>
           </a:prstGeom>
           <a:solidFill>
-            <a:srgbClr val="D9EAD3"/>
+            <a:srgbClr val="FCE5CD"/>
           </a:solidFill>
-          <a:ln w="22860">
+          <a:ln w="21590">
             <a:solidFill>
-              <a:srgbClr val="44546A"/>
+              <a:srgbClr val="BC823E"/>
             </a:solidFill>
           </a:ln>
-          <a:effectLst/>
         </p:spPr>
         <p:style>
           <a:lnRef idx="1">
@@ -17457,225 +18450,42 @@
           </a:fontRef>
         </p:style>
         <p:txBody>
-          <a:bodyPr rtlCol="0" anchor="ctr" wrap="square" lIns="36576" rIns="36576"/>
+          <a:bodyPr rtlCol="0" anchor="ctr" wrap="none" lIns="22860" rIns="22860"/>
           <a:lstStyle/>
           <a:p>
-            <a:pPr algn="ctr">
-              <a:spcAft>
-                <a:spcPts val="100"/>
-              </a:spcAft>
-            </a:pPr>
+            <a:pPr algn="ctr"/>
             <a:r>
-              <a:rPr sz="1800" b="0">
+              <a:rPr sz="2200" b="1">
                 <a:solidFill>
                   <a:srgbClr val="000000"/>
                 </a:solidFill>
                 <a:latin typeface="Arial"/>
               </a:rPr>
-              <a:t>Condition i</a:t>
-            </a:r>
-          </a:p>
-        </p:txBody>
-      </p:sp>
-      <p:sp>
-        <p:nvSpPr>
-          <p:cNvPr id="117" name="Rectangle 116"/>
-          <p:cNvSpPr/>
-          <p:nvPr/>
-        </p:nvSpPr>
-        <p:spPr>
-          <a:xfrm>
-            <a:off x="932688" y="3950208"/>
-            <a:ext cx="1527048" cy="585216"/>
-          </a:xfrm>
-          <a:prstGeom prst="rect">
-            <a:avLst/>
-          </a:prstGeom>
-          <a:solidFill>
-            <a:srgbClr val="E7E6E6"/>
-          </a:solidFill>
-          <a:ln w="22860">
-            <a:solidFill>
-              <a:srgbClr val="44546A"/>
-            </a:solidFill>
-          </a:ln>
-          <a:effectLst/>
-        </p:spPr>
-        <p:style>
-          <a:lnRef idx="1">
-            <a:schemeClr val="accent1"/>
-          </a:lnRef>
-          <a:fillRef idx="3">
-            <a:schemeClr val="accent1"/>
-          </a:fillRef>
-          <a:effectRef idx="0">
-            <a:schemeClr val="accent1"/>
-          </a:effectRef>
-          <a:fontRef idx="minor">
-            <a:schemeClr val="lt1"/>
-          </a:fontRef>
-        </p:style>
-        <p:txBody>
-          <a:bodyPr rtlCol="0" anchor="ctr" wrap="square" lIns="36576" rIns="36576"/>
-          <a:lstStyle/>
-          <a:p>
-            <a:pPr algn="ctr">
-              <a:spcAft>
-                <a:spcPts val="100"/>
-              </a:spcAft>
-            </a:pPr>
-            <a:r>
-              <a:rPr sz="1800" b="0">
-                <a:solidFill>
-                  <a:srgbClr val="000000"/>
-                </a:solidFill>
-                <a:latin typeface="Arial"/>
-              </a:rPr>
-              <a:t>Condition j</a:t>
-            </a:r>
-          </a:p>
-        </p:txBody>
-      </p:sp>
-      <p:sp>
-        <p:nvSpPr>
-          <p:cNvPr id="118" name="Rectangle 117"/>
-          <p:cNvSpPr/>
-          <p:nvPr/>
-        </p:nvSpPr>
-        <p:spPr>
-          <a:xfrm>
-            <a:off x="3767328" y="2779776"/>
-            <a:ext cx="1527048" cy="585216"/>
-          </a:xfrm>
-          <a:prstGeom prst="rect">
-            <a:avLst/>
-          </a:prstGeom>
-          <a:solidFill>
-            <a:srgbClr val="D9EAD3"/>
-          </a:solidFill>
-          <a:ln w="22860">
-            <a:solidFill>
-              <a:srgbClr val="44546A"/>
-            </a:solidFill>
-          </a:ln>
-          <a:effectLst/>
-        </p:spPr>
-        <p:style>
-          <a:lnRef idx="1">
-            <a:schemeClr val="accent1"/>
-          </a:lnRef>
-          <a:fillRef idx="3">
-            <a:schemeClr val="accent1"/>
-          </a:fillRef>
-          <a:effectRef idx="0">
-            <a:schemeClr val="accent1"/>
-          </a:effectRef>
-          <a:fontRef idx="minor">
-            <a:schemeClr val="lt1"/>
-          </a:fontRef>
-        </p:style>
-        <p:txBody>
-          <a:bodyPr rtlCol="0" anchor="ctr" wrap="square" lIns="36576" rIns="36576"/>
-          <a:lstStyle/>
-          <a:p>
-            <a:pPr algn="ctr">
-              <a:spcAft>
-                <a:spcPts val="100"/>
-              </a:spcAft>
-            </a:pPr>
-            <a:r>
-              <a:rPr sz="1800" b="0">
-                <a:solidFill>
-                  <a:srgbClr val="000000"/>
-                </a:solidFill>
-                <a:latin typeface="Arial"/>
-              </a:rPr>
-              <a:t>Condition i</a:t>
-            </a:r>
-          </a:p>
-        </p:txBody>
-      </p:sp>
-      <p:sp>
-        <p:nvSpPr>
-          <p:cNvPr id="119" name="Rectangle 118"/>
-          <p:cNvSpPr/>
-          <p:nvPr/>
-        </p:nvSpPr>
-        <p:spPr>
-          <a:xfrm>
-            <a:off x="3767328" y="3950208"/>
-            <a:ext cx="1527048" cy="585216"/>
-          </a:xfrm>
-          <a:prstGeom prst="rect">
-            <a:avLst/>
-          </a:prstGeom>
-          <a:solidFill>
-            <a:srgbClr val="E7E6E6"/>
-          </a:solidFill>
-          <a:ln w="22860">
-            <a:solidFill>
-              <a:srgbClr val="44546A"/>
-            </a:solidFill>
-          </a:ln>
-          <a:effectLst/>
-        </p:spPr>
-        <p:style>
-          <a:lnRef idx="1">
-            <a:schemeClr val="accent1"/>
-          </a:lnRef>
-          <a:fillRef idx="3">
-            <a:schemeClr val="accent1"/>
-          </a:fillRef>
-          <a:effectRef idx="0">
-            <a:schemeClr val="accent1"/>
-          </a:effectRef>
-          <a:fontRef idx="minor">
-            <a:schemeClr val="lt1"/>
-          </a:fontRef>
-        </p:style>
-        <p:txBody>
-          <a:bodyPr rtlCol="0" anchor="ctr" wrap="square" lIns="36576" rIns="36576"/>
-          <a:lstStyle/>
-          <a:p>
-            <a:pPr algn="ctr">
-              <a:spcAft>
-                <a:spcPts val="100"/>
-              </a:spcAft>
-            </a:pPr>
-            <a:r>
-              <a:rPr sz="1800" b="0">
-                <a:solidFill>
-                  <a:srgbClr val="000000"/>
-                </a:solidFill>
-                <a:latin typeface="Arial"/>
-              </a:rPr>
-              <a:t>Condition j</a:t>
+              <a:t>Path 1 emb</a:t>
             </a:r>
           </a:p>
         </p:txBody>
       </p:sp>
       <p:cxnSp>
         <p:nvCxnSpPr>
-          <p:cNvPr id="120" name="Connector 119"/>
+          <p:cNvPr id="115" name="Connector 114"/>
           <p:cNvCxnSpPr/>
           <p:nvPr/>
         </p:nvCxnSpPr>
         <p:spPr>
           <a:xfrm>
-            <a:off x="2459736" y="3072384"/>
-            <a:ext cx="1307592" cy="0"/>
+            <a:off x="3602736" y="2157984"/>
+            <a:ext cx="301751" cy="0"/>
           </a:xfrm>
           <a:prstGeom prst="line">
             <a:avLst/>
           </a:prstGeom>
-          <a:ln w="27940">
+          <a:ln w="20320">
             <a:solidFill>
-              <a:srgbClr val="45805A"/>
+              <a:srgbClr val="44546A"/>
             </a:solidFill>
-            <a:headEnd type="triangle" w="sm" len="sm"/>
-            <a:tailEnd type="triangle" w="sm" len="sm"/>
+            <a:tailEnd type="triangle"/>
           </a:ln>
-          <a:effectLst/>
         </p:spPr>
         <p:style>
           <a:lnRef idx="2">
@@ -17684,7 +18494,7 @@
           <a:fillRef idx="0">
             <a:schemeClr val="accent1"/>
           </a:fillRef>
-          <a:effectRef idx="1">
+          <a:effectRef idx="0">
             <a:schemeClr val="accent1"/>
           </a:effectRef>
           <a:fontRef idx="minor">
@@ -17694,39 +18504,296 @@
       </p:cxnSp>
       <p:sp>
         <p:nvSpPr>
-          <p:cNvPr id="121" name="TextBox 120"/>
-          <p:cNvSpPr txBox="1"/>
+          <p:cNvPr id="116" name="Rounded Rectangle 115"/>
+          <p:cNvSpPr/>
           <p:nvPr/>
         </p:nvSpPr>
         <p:spPr>
           <a:xfrm>
-            <a:off x="2487168" y="2679192"/>
-            <a:ext cx="1252728" cy="274320"/>
+            <a:off x="3904487" y="2560320"/>
+            <a:ext cx="2267712" cy="475488"/>
           </a:xfrm>
-          <a:prstGeom prst="rect">
+          <a:prstGeom prst="roundRect">
+            <a:avLst>
+              <a:gd name="adj" fmla="val 10000"/>
+            </a:avLst>
+          </a:prstGeom>
+          <a:solidFill>
+            <a:srgbClr val="D9EAD3"/>
+          </a:solidFill>
+          <a:ln w="21590">
+            <a:solidFill>
+              <a:srgbClr val="44546A"/>
+            </a:solidFill>
+          </a:ln>
+        </p:spPr>
+        <p:style>
+          <a:lnRef idx="1">
+            <a:schemeClr val="accent1"/>
+          </a:lnRef>
+          <a:fillRef idx="3">
+            <a:schemeClr val="accent1"/>
+          </a:fillRef>
+          <a:effectRef idx="0">
+            <a:schemeClr val="accent1"/>
+          </a:effectRef>
+          <a:fontRef idx="minor">
+            <a:schemeClr val="lt1"/>
+          </a:fontRef>
+        </p:style>
+        <p:txBody>
+          <a:bodyPr rtlCol="0" anchor="ctr" wrap="none" lIns="22860" rIns="22860"/>
+          <a:lstStyle/>
+          <a:p>
+            <a:pPr algn="ctr"/>
+            <a:r>
+              <a:rPr sz="2200" b="1">
+                <a:solidFill>
+                  <a:srgbClr val="000000"/>
+                </a:solidFill>
+                <a:latin typeface="Arial"/>
+              </a:rPr>
+              <a:t>Room emb</a:t>
+            </a:r>
+          </a:p>
+        </p:txBody>
+      </p:sp>
+      <p:cxnSp>
+        <p:nvCxnSpPr>
+          <p:cNvPr id="117" name="Connector 116"/>
+          <p:cNvCxnSpPr/>
+          <p:nvPr/>
+        </p:nvCxnSpPr>
+        <p:spPr>
+          <a:xfrm>
+            <a:off x="3602736" y="2798063"/>
+            <a:ext cx="301751" cy="0"/>
+          </a:xfrm>
+          <a:prstGeom prst="line">
             <a:avLst/>
           </a:prstGeom>
-          <a:noFill/>
+          <a:ln w="20320">
+            <a:solidFill>
+              <a:srgbClr val="44546A"/>
+            </a:solidFill>
+            <a:tailEnd type="triangle"/>
+          </a:ln>
         </p:spPr>
+        <p:style>
+          <a:lnRef idx="2">
+            <a:schemeClr val="accent1"/>
+          </a:lnRef>
+          <a:fillRef idx="0">
+            <a:schemeClr val="accent1"/>
+          </a:fillRef>
+          <a:effectRef idx="0">
+            <a:schemeClr val="accent1"/>
+          </a:effectRef>
+          <a:fontRef idx="minor">
+            <a:schemeClr val="tx1"/>
+          </a:fontRef>
+        </p:style>
+      </p:cxnSp>
+      <p:sp>
+        <p:nvSpPr>
+          <p:cNvPr id="118" name="Rounded Rectangle 117"/>
+          <p:cNvSpPr/>
+          <p:nvPr/>
+        </p:nvSpPr>
+        <p:spPr>
+          <a:xfrm>
+            <a:off x="3904487" y="3200400"/>
+            <a:ext cx="2267712" cy="475488"/>
+          </a:xfrm>
+          <a:prstGeom prst="roundRect">
+            <a:avLst>
+              <a:gd name="adj" fmla="val 10000"/>
+            </a:avLst>
+          </a:prstGeom>
+          <a:solidFill>
+            <a:srgbClr val="FFF2CC"/>
+          </a:solidFill>
+          <a:ln w="21590">
+            <a:solidFill>
+              <a:srgbClr val="44546A"/>
+            </a:solidFill>
+          </a:ln>
+        </p:spPr>
+        <p:style>
+          <a:lnRef idx="1">
+            <a:schemeClr val="accent1"/>
+          </a:lnRef>
+          <a:fillRef idx="3">
+            <a:schemeClr val="accent1"/>
+          </a:fillRef>
+          <a:effectRef idx="0">
+            <a:schemeClr val="accent1"/>
+          </a:effectRef>
+          <a:fontRef idx="minor">
+            <a:schemeClr val="lt1"/>
+          </a:fontRef>
+        </p:style>
         <p:txBody>
-          <a:bodyPr wrap="square" lIns="22860" rIns="22860" tIns="13716" bIns="13716">
-            <a:spAutoFit/>
-          </a:bodyPr>
+          <a:bodyPr rtlCol="0" anchor="ctr" wrap="none" lIns="22860" rIns="22860"/>
           <a:lstStyle/>
           <a:p>
-            <a:pPr algn="ctr">
-              <a:spcAft>
-                <a:spcPts val="300"/>
-              </a:spcAft>
-            </a:pPr>
+            <a:pPr algn="ctr"/>
             <a:r>
-              <a:rPr sz="1400" b="0">
-                <a:solidFill>
-                  <a:srgbClr val="45805A"/>
+              <a:rPr sz="2200" b="1">
+                <a:solidFill>
+                  <a:srgbClr val="000000"/>
                 </a:solidFill>
                 <a:latin typeface="Arial"/>
               </a:rPr>
-              <a:t>pull together</a:t>
+              <a:t>Path 2 emb</a:t>
+            </a:r>
+          </a:p>
+        </p:txBody>
+      </p:sp>
+      <p:cxnSp>
+        <p:nvCxnSpPr>
+          <p:cNvPr id="119" name="Connector 118"/>
+          <p:cNvCxnSpPr/>
+          <p:nvPr/>
+        </p:nvCxnSpPr>
+        <p:spPr>
+          <a:xfrm>
+            <a:off x="3602736" y="3438144"/>
+            <a:ext cx="301751" cy="0"/>
+          </a:xfrm>
+          <a:prstGeom prst="line">
+            <a:avLst/>
+          </a:prstGeom>
+          <a:ln w="20320">
+            <a:solidFill>
+              <a:srgbClr val="44546A"/>
+            </a:solidFill>
+            <a:tailEnd type="triangle"/>
+          </a:ln>
+        </p:spPr>
+        <p:style>
+          <a:lnRef idx="2">
+            <a:schemeClr val="accent1"/>
+          </a:lnRef>
+          <a:fillRef idx="0">
+            <a:schemeClr val="accent1"/>
+          </a:fillRef>
+          <a:effectRef idx="0">
+            <a:schemeClr val="accent1"/>
+          </a:effectRef>
+          <a:fontRef idx="minor">
+            <a:schemeClr val="tx1"/>
+          </a:fontRef>
+        </p:style>
+      </p:cxnSp>
+      <p:sp>
+        <p:nvSpPr>
+          <p:cNvPr id="120" name="Rounded Rectangle 119"/>
+          <p:cNvSpPr/>
+          <p:nvPr/>
+        </p:nvSpPr>
+        <p:spPr>
+          <a:xfrm>
+            <a:off x="7607808" y="1810512"/>
+            <a:ext cx="1335024" cy="713232"/>
+          </a:xfrm>
+          <a:prstGeom prst="roundRect">
+            <a:avLst>
+              <a:gd name="adj" fmla="val 10000"/>
+            </a:avLst>
+          </a:prstGeom>
+          <a:solidFill>
+            <a:srgbClr val="F3F3F3"/>
+          </a:solidFill>
+          <a:ln w="21590">
+            <a:solidFill>
+              <a:srgbClr val="44546A"/>
+            </a:solidFill>
+          </a:ln>
+        </p:spPr>
+        <p:style>
+          <a:lnRef idx="1">
+            <a:schemeClr val="accent1"/>
+          </a:lnRef>
+          <a:fillRef idx="3">
+            <a:schemeClr val="accent1"/>
+          </a:fillRef>
+          <a:effectRef idx="0">
+            <a:schemeClr val="accent1"/>
+          </a:effectRef>
+          <a:fontRef idx="minor">
+            <a:schemeClr val="lt1"/>
+          </a:fontRef>
+        </p:style>
+        <p:txBody>
+          <a:bodyPr rtlCol="0" anchor="ctr" wrap="none" lIns="22860" rIns="22860"/>
+          <a:lstStyle/>
+          <a:p>
+            <a:pPr algn="ctr"/>
+            <a:r>
+              <a:rPr sz="2100" b="1">
+                <a:solidFill>
+                  <a:srgbClr val="000000"/>
+                </a:solidFill>
+                <a:latin typeface="Arial"/>
+              </a:rPr>
+              <a:t>Decoder</a:t>
+            </a:r>
+          </a:p>
+        </p:txBody>
+      </p:sp>
+      <p:sp>
+        <p:nvSpPr>
+          <p:cNvPr id="121" name="Rounded Rectangle 120"/>
+          <p:cNvSpPr/>
+          <p:nvPr/>
+        </p:nvSpPr>
+        <p:spPr>
+          <a:xfrm>
+            <a:off x="7607808" y="3090672"/>
+            <a:ext cx="1335024" cy="713232"/>
+          </a:xfrm>
+          <a:prstGeom prst="roundRect">
+            <a:avLst>
+              <a:gd name="adj" fmla="val 10000"/>
+            </a:avLst>
+          </a:prstGeom>
+          <a:solidFill>
+            <a:srgbClr val="F3F3F3"/>
+          </a:solidFill>
+          <a:ln w="21590">
+            <a:solidFill>
+              <a:srgbClr val="44546A"/>
+            </a:solidFill>
+          </a:ln>
+        </p:spPr>
+        <p:style>
+          <a:lnRef idx="1">
+            <a:schemeClr val="accent1"/>
+          </a:lnRef>
+          <a:fillRef idx="3">
+            <a:schemeClr val="accent1"/>
+          </a:fillRef>
+          <a:effectRef idx="0">
+            <a:schemeClr val="accent1"/>
+          </a:effectRef>
+          <a:fontRef idx="minor">
+            <a:schemeClr val="lt1"/>
+          </a:fontRef>
+        </p:style>
+        <p:txBody>
+          <a:bodyPr rtlCol="0" anchor="ctr" wrap="none" lIns="22860" rIns="22860"/>
+          <a:lstStyle/>
+          <a:p>
+            <a:pPr algn="ctr"/>
+            <a:r>
+              <a:rPr sz="2100" b="1">
+                <a:solidFill>
+                  <a:srgbClr val="000000"/>
+                </a:solidFill>
+                <a:latin typeface="Arial"/>
+              </a:rPr>
+              <a:t>Decoder</a:t>
             </a:r>
           </a:p>
         </p:txBody>
@@ -17739,21 +18806,18 @@
         </p:nvCxnSpPr>
         <p:spPr>
           <a:xfrm>
-            <a:off x="1700784" y="3364992"/>
-            <a:ext cx="0" cy="585216"/>
+            <a:off x="6172200" y="2157984"/>
+            <a:ext cx="1435608" cy="0"/>
           </a:xfrm>
           <a:prstGeom prst="line">
             <a:avLst/>
           </a:prstGeom>
-          <a:ln w="22860">
+          <a:ln w="20320">
             <a:solidFill>
-              <a:srgbClr val="B45B58"/>
+              <a:srgbClr val="44546A"/>
             </a:solidFill>
-            <a:prstDash val="dash"/>
-            <a:headEnd type="triangle" w="sm" len="sm"/>
-            <a:tailEnd type="triangle" w="sm" len="sm"/>
+            <a:tailEnd type="triangle"/>
           </a:ln>
-          <a:effectLst/>
         </p:spPr>
         <p:style>
           <a:lnRef idx="2">
@@ -17762,7 +18826,7 @@
           <a:fillRef idx="0">
             <a:schemeClr val="accent1"/>
           </a:fillRef>
-          <a:effectRef idx="1">
+          <a:effectRef idx="0">
             <a:schemeClr val="accent1"/>
           </a:effectRef>
           <a:fontRef idx="minor">
@@ -17778,21 +18842,18 @@
         </p:nvCxnSpPr>
         <p:spPr>
           <a:xfrm>
-            <a:off x="2459736" y="3364992"/>
-            <a:ext cx="1307592" cy="585216"/>
+            <a:off x="6172200" y="3438144"/>
+            <a:ext cx="1435608" cy="0"/>
           </a:xfrm>
           <a:prstGeom prst="line">
             <a:avLst/>
           </a:prstGeom>
-          <a:ln w="22860">
+          <a:ln w="20320">
             <a:solidFill>
-              <a:srgbClr val="B45B58"/>
+              <a:srgbClr val="44546A"/>
             </a:solidFill>
-            <a:prstDash val="dash"/>
-            <a:headEnd type="triangle" w="sm" len="sm"/>
-            <a:tailEnd type="triangle" w="sm" len="sm"/>
+            <a:tailEnd type="triangle"/>
           </a:ln>
-          <a:effectLst/>
         </p:spPr>
         <p:style>
           <a:lnRef idx="2">
@@ -17801,7 +18862,185 @@
           <a:fillRef idx="0">
             <a:schemeClr val="accent1"/>
           </a:fillRef>
-          <a:effectRef idx="1">
+          <a:effectRef idx="0">
+            <a:schemeClr val="accent1"/>
+          </a:effectRef>
+          <a:fontRef idx="minor">
+            <a:schemeClr val="tx1"/>
+          </a:fontRef>
+        </p:style>
+      </p:cxnSp>
+      <p:cxnSp>
+        <p:nvCxnSpPr>
+          <p:cNvPr id="124" name="Connector 123"/>
+          <p:cNvCxnSpPr/>
+          <p:nvPr/>
+        </p:nvCxnSpPr>
+        <p:spPr>
+          <a:xfrm>
+            <a:off x="6172200" y="2798064"/>
+            <a:ext cx="978408" cy="0"/>
+          </a:xfrm>
+          <a:prstGeom prst="line">
+            <a:avLst/>
+          </a:prstGeom>
+          <a:ln w="20320">
+            <a:solidFill>
+              <a:srgbClr val="44546A"/>
+            </a:solidFill>
+          </a:ln>
+        </p:spPr>
+        <p:style>
+          <a:lnRef idx="2">
+            <a:schemeClr val="accent1"/>
+          </a:lnRef>
+          <a:fillRef idx="0">
+            <a:schemeClr val="accent1"/>
+          </a:fillRef>
+          <a:effectRef idx="0">
+            <a:schemeClr val="accent1"/>
+          </a:effectRef>
+          <a:fontRef idx="minor">
+            <a:schemeClr val="tx1"/>
+          </a:fontRef>
+        </p:style>
+      </p:cxnSp>
+      <p:cxnSp>
+        <p:nvCxnSpPr>
+          <p:cNvPr id="125" name="Connector 124"/>
+          <p:cNvCxnSpPr/>
+          <p:nvPr/>
+        </p:nvCxnSpPr>
+        <p:spPr>
+          <a:xfrm>
+            <a:off x="7150608" y="2377440"/>
+            <a:ext cx="0" cy="868680"/>
+          </a:xfrm>
+          <a:prstGeom prst="line">
+            <a:avLst/>
+          </a:prstGeom>
+          <a:ln w="20320">
+            <a:solidFill>
+              <a:srgbClr val="44546A"/>
+            </a:solidFill>
+          </a:ln>
+        </p:spPr>
+        <p:style>
+          <a:lnRef idx="2">
+            <a:schemeClr val="accent1"/>
+          </a:lnRef>
+          <a:fillRef idx="0">
+            <a:schemeClr val="accent1"/>
+          </a:fillRef>
+          <a:effectRef idx="0">
+            <a:schemeClr val="accent1"/>
+          </a:effectRef>
+          <a:fontRef idx="minor">
+            <a:schemeClr val="tx1"/>
+          </a:fontRef>
+        </p:style>
+      </p:cxnSp>
+      <p:cxnSp>
+        <p:nvCxnSpPr>
+          <p:cNvPr id="126" name="Connector 125"/>
+          <p:cNvCxnSpPr/>
+          <p:nvPr/>
+        </p:nvCxnSpPr>
+        <p:spPr>
+          <a:xfrm>
+            <a:off x="7150608" y="2377440"/>
+            <a:ext cx="457200" cy="0"/>
+          </a:xfrm>
+          <a:prstGeom prst="line">
+            <a:avLst/>
+          </a:prstGeom>
+          <a:ln w="20320">
+            <a:solidFill>
+              <a:srgbClr val="44546A"/>
+            </a:solidFill>
+            <a:tailEnd type="triangle"/>
+          </a:ln>
+        </p:spPr>
+        <p:style>
+          <a:lnRef idx="2">
+            <a:schemeClr val="accent1"/>
+          </a:lnRef>
+          <a:fillRef idx="0">
+            <a:schemeClr val="accent1"/>
+          </a:fillRef>
+          <a:effectRef idx="0">
+            <a:schemeClr val="accent1"/>
+          </a:effectRef>
+          <a:fontRef idx="minor">
+            <a:schemeClr val="tx1"/>
+          </a:fontRef>
+        </p:style>
+      </p:cxnSp>
+      <p:cxnSp>
+        <p:nvCxnSpPr>
+          <p:cNvPr id="127" name="Connector 126"/>
+          <p:cNvCxnSpPr/>
+          <p:nvPr/>
+        </p:nvCxnSpPr>
+        <p:spPr>
+          <a:xfrm>
+            <a:off x="7150608" y="3246120"/>
+            <a:ext cx="457200" cy="0"/>
+          </a:xfrm>
+          <a:prstGeom prst="line">
+            <a:avLst/>
+          </a:prstGeom>
+          <a:ln w="20320">
+            <a:solidFill>
+              <a:srgbClr val="44546A"/>
+            </a:solidFill>
+            <a:tailEnd type="triangle"/>
+          </a:ln>
+        </p:spPr>
+        <p:style>
+          <a:lnRef idx="2">
+            <a:schemeClr val="accent1"/>
+          </a:lnRef>
+          <a:fillRef idx="0">
+            <a:schemeClr val="accent1"/>
+          </a:fillRef>
+          <a:effectRef idx="0">
+            <a:schemeClr val="accent1"/>
+          </a:effectRef>
+          <a:fontRef idx="minor">
+            <a:schemeClr val="tx1"/>
+          </a:fontRef>
+        </p:style>
+      </p:cxnSp>
+      <p:cxnSp>
+        <p:nvCxnSpPr>
+          <p:cNvPr id="128" name="Connector 127"/>
+          <p:cNvCxnSpPr/>
+          <p:nvPr/>
+        </p:nvCxnSpPr>
+        <p:spPr>
+          <a:xfrm>
+            <a:off x="8942832" y="2157984"/>
+            <a:ext cx="402336" cy="0"/>
+          </a:xfrm>
+          <a:prstGeom prst="line">
+            <a:avLst/>
+          </a:prstGeom>
+          <a:ln w="20320">
+            <a:solidFill>
+              <a:srgbClr val="44546A"/>
+            </a:solidFill>
+            <a:tailEnd type="triangle"/>
+          </a:ln>
+        </p:spPr>
+        <p:style>
+          <a:lnRef idx="2">
+            <a:schemeClr val="accent1"/>
+          </a:lnRef>
+          <a:fillRef idx="0">
+            <a:schemeClr val="accent1"/>
+          </a:fillRef>
+          <a:effectRef idx="0">
             <a:schemeClr val="accent1"/>
           </a:effectRef>
           <a:fontRef idx="minor">
@@ -17811,14 +19050,14 @@
       </p:cxnSp>
       <p:sp>
         <p:nvSpPr>
-          <p:cNvPr id="124" name="TextBox 123"/>
+          <p:cNvPr id="129" name="TextBox 128"/>
           <p:cNvSpPr txBox="1"/>
           <p:nvPr/>
         </p:nvSpPr>
         <p:spPr>
           <a:xfrm>
-            <a:off x="2240280" y="3602736"/>
-            <a:ext cx="1517904" cy="265176"/>
+            <a:off x="9464040" y="1938528"/>
+            <a:ext cx="1463040" cy="384048"/>
           </a:xfrm>
           <a:prstGeom prst="rect">
             <a:avLst/>
@@ -17826,315 +19065,24 @@
           <a:noFill/>
         </p:spPr>
         <p:txBody>
-          <a:bodyPr wrap="square" lIns="22860" rIns="22860" tIns="13716" bIns="13716">
-            <a:spAutoFit/>
-          </a:bodyPr>
-          <a:lstStyle/>
-          <a:p>
-            <a:pPr algn="ctr">
-              <a:spcAft>
-                <a:spcPts val="300"/>
-              </a:spcAft>
-            </a:pPr>
-            <a:r>
-              <a:rPr sz="1400" b="0">
-                <a:solidFill>
-                  <a:srgbClr val="B45B58"/>
-                </a:solidFill>
-                <a:latin typeface="Arial"/>
-              </a:rPr>
-              <a:t>push apart</a:t>
-            </a:r>
-          </a:p>
-        </p:txBody>
-      </p:sp>
-      <p:sp>
-        <p:nvSpPr>
-          <p:cNvPr id="125" name="TextBox 124"/>
-          <p:cNvSpPr txBox="1"/>
-          <p:nvPr/>
-        </p:nvSpPr>
-        <p:spPr>
-          <a:xfrm>
-            <a:off x="704088" y="4700016"/>
-            <a:ext cx="5074920" cy="676656"/>
-          </a:xfrm>
-          <a:prstGeom prst="rect">
-            <a:avLst/>
-          </a:prstGeom>
-          <a:noFill/>
-        </p:spPr>
-        <p:txBody>
-          <a:bodyPr wrap="square" lIns="22860" rIns="22860" tIns="13716" bIns="13716">
+          <a:bodyPr wrap="none" lIns="18288" rIns="18288" tIns="9144" bIns="9144">
             <a:spAutoFit/>
           </a:bodyPr>
           <a:lstStyle/>
           <a:p>
             <a:pPr algn="l">
               <a:spcAft>
-                <a:spcPts val="300"/>
+                <a:spcPts val="200"/>
               </a:spcAft>
             </a:pPr>
             <a:r>
-              <a:rPr sz="1800" b="0">
+              <a:rPr sz="2400" b="1">
                 <a:solidFill>
                   <a:srgbClr val="000000"/>
                 </a:solidFill>
                 <a:latin typeface="Arial"/>
               </a:rPr>
-              <a:t>+ Same fixed RIR pair, different speech</a:t>
-            </a:r>
-          </a:p>
-          <a:p>
-            <a:pPr algn="l">
-              <a:spcAft>
-                <a:spcPts val="300"/>
-              </a:spcAft>
-            </a:pPr>
-            <a:r>
-              <a:rPr sz="1800" b="0">
-                <a:solidFill>
-                  <a:srgbClr val="000000"/>
-                </a:solidFill>
-                <a:latin typeface="Arial"/>
-              </a:rPr>
-              <a:t>− Other batch items (both views)</a:t>
-            </a:r>
-          </a:p>
-        </p:txBody>
-      </p:sp>
-      <p:sp>
-        <p:nvSpPr>
-          <p:cNvPr id="126" name="Rectangle 125"/>
-          <p:cNvSpPr/>
-          <p:nvPr/>
-        </p:nvSpPr>
-        <p:spPr>
-          <a:xfrm>
-            <a:off x="6675120" y="2779776"/>
-            <a:ext cx="1527048" cy="585216"/>
-          </a:xfrm>
-          <a:prstGeom prst="rect">
-            <a:avLst/>
-          </a:prstGeom>
-          <a:solidFill>
-            <a:srgbClr val="FCE5CD"/>
-          </a:solidFill>
-          <a:ln w="22860">
-            <a:solidFill>
-              <a:srgbClr val="44546A"/>
-            </a:solidFill>
-          </a:ln>
-          <a:effectLst/>
-        </p:spPr>
-        <p:style>
-          <a:lnRef idx="1">
-            <a:schemeClr val="accent1"/>
-          </a:lnRef>
-          <a:fillRef idx="3">
-            <a:schemeClr val="accent1"/>
-          </a:fillRef>
-          <a:effectRef idx="0">
-            <a:schemeClr val="accent1"/>
-          </a:effectRef>
-          <a:fontRef idx="minor">
-            <a:schemeClr val="lt1"/>
-          </a:fontRef>
-        </p:style>
-        <p:txBody>
-          <a:bodyPr rtlCol="0" anchor="ctr" wrap="square" lIns="36576" rIns="36576"/>
-          <a:lstStyle/>
-          <a:p>
-            <a:pPr algn="ctr">
-              <a:spcAft>
-                <a:spcPts val="100"/>
-              </a:spcAft>
-            </a:pPr>
-            <a:r>
-              <a:rPr sz="1800" b="0">
-                <a:solidFill>
-                  <a:srgbClr val="000000"/>
-                </a:solidFill>
-                <a:latin typeface="Arial"/>
-              </a:rPr>
-              <a:t>Path 1</a:t>
-            </a:r>
-          </a:p>
-        </p:txBody>
-      </p:sp>
-      <p:sp>
-        <p:nvSpPr>
-          <p:cNvPr id="127" name="Rectangle 126"/>
-          <p:cNvSpPr/>
-          <p:nvPr/>
-        </p:nvSpPr>
-        <p:spPr>
-          <a:xfrm>
-            <a:off x="6675120" y="3950208"/>
-            <a:ext cx="1527048" cy="585216"/>
-          </a:xfrm>
-          <a:prstGeom prst="rect">
-            <a:avLst/>
-          </a:prstGeom>
-          <a:solidFill>
-            <a:srgbClr val="FFF2CC"/>
-          </a:solidFill>
-          <a:ln w="22860">
-            <a:solidFill>
-              <a:srgbClr val="44546A"/>
-            </a:solidFill>
-          </a:ln>
-          <a:effectLst/>
-        </p:spPr>
-        <p:style>
-          <a:lnRef idx="1">
-            <a:schemeClr val="accent1"/>
-          </a:lnRef>
-          <a:fillRef idx="3">
-            <a:schemeClr val="accent1"/>
-          </a:fillRef>
-          <a:effectRef idx="0">
-            <a:schemeClr val="accent1"/>
-          </a:effectRef>
-          <a:fontRef idx="minor">
-            <a:schemeClr val="lt1"/>
-          </a:fontRef>
-        </p:style>
-        <p:txBody>
-          <a:bodyPr rtlCol="0" anchor="ctr" wrap="square" lIns="36576" rIns="36576"/>
-          <a:lstStyle/>
-          <a:p>
-            <a:pPr algn="ctr">
-              <a:spcAft>
-                <a:spcPts val="100"/>
-              </a:spcAft>
-            </a:pPr>
-            <a:r>
-              <a:rPr sz="1800" b="0">
-                <a:solidFill>
-                  <a:srgbClr val="000000"/>
-                </a:solidFill>
-                <a:latin typeface="Arial"/>
-              </a:rPr>
-              <a:t>Path 2</a:t>
-            </a:r>
-          </a:p>
-        </p:txBody>
-      </p:sp>
-      <p:sp>
-        <p:nvSpPr>
-          <p:cNvPr id="128" name="Rectangle 127"/>
-          <p:cNvSpPr/>
-          <p:nvPr/>
-        </p:nvSpPr>
-        <p:spPr>
-          <a:xfrm>
-            <a:off x="9509760" y="2779776"/>
-            <a:ext cx="1527048" cy="585216"/>
-          </a:xfrm>
-          <a:prstGeom prst="rect">
-            <a:avLst/>
-          </a:prstGeom>
-          <a:solidFill>
-            <a:srgbClr val="FCE5CD"/>
-          </a:solidFill>
-          <a:ln w="22860">
-            <a:solidFill>
-              <a:srgbClr val="44546A"/>
-            </a:solidFill>
-          </a:ln>
-          <a:effectLst/>
-        </p:spPr>
-        <p:style>
-          <a:lnRef idx="1">
-            <a:schemeClr val="accent1"/>
-          </a:lnRef>
-          <a:fillRef idx="3">
-            <a:schemeClr val="accent1"/>
-          </a:fillRef>
-          <a:effectRef idx="0">
-            <a:schemeClr val="accent1"/>
-          </a:effectRef>
-          <a:fontRef idx="minor">
-            <a:schemeClr val="lt1"/>
-          </a:fontRef>
-        </p:style>
-        <p:txBody>
-          <a:bodyPr rtlCol="0" anchor="ctr" wrap="square" lIns="36576" rIns="36576"/>
-          <a:lstStyle/>
-          <a:p>
-            <a:pPr algn="ctr">
-              <a:spcAft>
-                <a:spcPts val="100"/>
-              </a:spcAft>
-            </a:pPr>
-            <a:r>
-              <a:rPr sz="1800" b="0">
-                <a:solidFill>
-                  <a:srgbClr val="000000"/>
-                </a:solidFill>
-                <a:latin typeface="Arial"/>
-              </a:rPr>
-              <a:t>Path 1</a:t>
-            </a:r>
-          </a:p>
-        </p:txBody>
-      </p:sp>
-      <p:sp>
-        <p:nvSpPr>
-          <p:cNvPr id="129" name="Rectangle 128"/>
-          <p:cNvSpPr/>
-          <p:nvPr/>
-        </p:nvSpPr>
-        <p:spPr>
-          <a:xfrm>
-            <a:off x="9509760" y="3950208"/>
-            <a:ext cx="1527048" cy="585216"/>
-          </a:xfrm>
-          <a:prstGeom prst="rect">
-            <a:avLst/>
-          </a:prstGeom>
-          <a:solidFill>
-            <a:srgbClr val="FFF2CC"/>
-          </a:solidFill>
-          <a:ln w="22860">
-            <a:solidFill>
-              <a:srgbClr val="44546A"/>
-            </a:solidFill>
-          </a:ln>
-          <a:effectLst/>
-        </p:spPr>
-        <p:style>
-          <a:lnRef idx="1">
-            <a:schemeClr val="accent1"/>
-          </a:lnRef>
-          <a:fillRef idx="3">
-            <a:schemeClr val="accent1"/>
-          </a:fillRef>
-          <a:effectRef idx="0">
-            <a:schemeClr val="accent1"/>
-          </a:effectRef>
-          <a:fontRef idx="minor">
-            <a:schemeClr val="lt1"/>
-          </a:fontRef>
-        </p:style>
-        <p:txBody>
-          <a:bodyPr rtlCol="0" anchor="ctr" wrap="square" lIns="36576" rIns="36576"/>
-          <a:lstStyle/>
-          <a:p>
-            <a:pPr algn="ctr">
-              <a:spcAft>
-                <a:spcPts val="100"/>
-              </a:spcAft>
-            </a:pPr>
-            <a:r>
-              <a:rPr sz="1800" b="0">
-                <a:solidFill>
-                  <a:srgbClr val="000000"/>
-                </a:solidFill>
-                <a:latin typeface="Arial"/>
-              </a:rPr>
-              <a:t>Path 2</a:t>
+              <a:t>CTF 1</a:t>
             </a:r>
           </a:p>
         </p:txBody>
@@ -18147,20 +19095,18 @@
         </p:nvCxnSpPr>
         <p:spPr>
           <a:xfrm>
-            <a:off x="8202168" y="3072384"/>
-            <a:ext cx="1307592" cy="0"/>
+            <a:off x="8942832" y="3438144"/>
+            <a:ext cx="402336" cy="0"/>
           </a:xfrm>
           <a:prstGeom prst="line">
             <a:avLst/>
           </a:prstGeom>
-          <a:ln w="27940">
+          <a:ln w="20320">
             <a:solidFill>
-              <a:srgbClr val="45805A"/>
+              <a:srgbClr val="44546A"/>
             </a:solidFill>
-            <a:headEnd type="triangle" w="sm" len="sm"/>
-            <a:tailEnd type="triangle" w="sm" len="sm"/>
+            <a:tailEnd type="triangle"/>
           </a:ln>
-          <a:effectLst/>
         </p:spPr>
         <p:style>
           <a:lnRef idx="2">
@@ -18169,7 +19115,7 @@
           <a:fillRef idx="0">
             <a:schemeClr val="accent1"/>
           </a:fillRef>
-          <a:effectRef idx="1">
+          <a:effectRef idx="0">
             <a:schemeClr val="accent1"/>
           </a:effectRef>
           <a:fontRef idx="minor">
@@ -18185,8 +19131,8 @@
         </p:nvSpPr>
         <p:spPr>
           <a:xfrm>
-            <a:off x="8229600" y="2679192"/>
-            <a:ext cx="1252728" cy="274320"/>
+            <a:off x="9464040" y="3218687"/>
+            <a:ext cx="1463040" cy="384048"/>
           </a:xfrm>
           <a:prstGeom prst="rect">
             <a:avLst/>
@@ -18194,51 +19140,182 @@
           <a:noFill/>
         </p:spPr>
         <p:txBody>
-          <a:bodyPr wrap="square" lIns="22860" rIns="22860" tIns="13716" bIns="13716">
+          <a:bodyPr wrap="none" lIns="18288" rIns="18288" tIns="9144" bIns="9144">
+            <a:spAutoFit/>
+          </a:bodyPr>
+          <a:lstStyle/>
+          <a:p>
+            <a:pPr algn="l">
+              <a:spcAft>
+                <a:spcPts val="200"/>
+              </a:spcAft>
+            </a:pPr>
+            <a:r>
+              <a:rPr sz="2400" b="1">
+                <a:solidFill>
+                  <a:srgbClr val="000000"/>
+                </a:solidFill>
+                <a:latin typeface="Arial"/>
+              </a:rPr>
+              <a:t>CTF 2</a:t>
+            </a:r>
+          </a:p>
+        </p:txBody>
+      </p:sp>
+      <p:sp>
+        <p:nvSpPr>
+          <p:cNvPr id="132" name="TextBox 131"/>
+          <p:cNvSpPr txBox="1"/>
+          <p:nvPr/>
+        </p:nvSpPr>
+        <p:spPr>
+          <a:xfrm>
+            <a:off x="530352" y="4764024"/>
+            <a:ext cx="1234440" cy="347472"/>
+          </a:xfrm>
+          <a:prstGeom prst="rect">
+            <a:avLst/>
+          </a:prstGeom>
+          <a:noFill/>
+        </p:spPr>
+        <p:txBody>
+          <a:bodyPr wrap="none" lIns="18288" rIns="18288" tIns="9144" bIns="9144">
             <a:spAutoFit/>
           </a:bodyPr>
           <a:lstStyle/>
           <a:p>
             <a:pPr algn="ctr">
               <a:spcAft>
-                <a:spcPts val="300"/>
+                <a:spcPts val="200"/>
               </a:spcAft>
             </a:pPr>
             <a:r>
-              <a:rPr sz="1400" b="0">
-                <a:solidFill>
-                  <a:srgbClr val="45805A"/>
+              <a:rPr sz="2300" b="1">
+                <a:solidFill>
+                  <a:srgbClr val="000000"/>
                 </a:solidFill>
                 <a:latin typeface="Arial"/>
               </a:rPr>
-              <a:t>pull together</a:t>
+              <a:t>Data B</a:t>
+            </a:r>
+          </a:p>
+        </p:txBody>
+      </p:sp>
+      <p:sp>
+        <p:nvSpPr>
+          <p:cNvPr id="133" name="TextBox 132"/>
+          <p:cNvSpPr txBox="1"/>
+          <p:nvPr/>
+        </p:nvSpPr>
+        <p:spPr>
+          <a:xfrm>
+            <a:off x="457200" y="5157216"/>
+            <a:ext cx="1371600" cy="329184"/>
+          </a:xfrm>
+          <a:prstGeom prst="rect">
+            <a:avLst/>
+          </a:prstGeom>
+          <a:noFill/>
+        </p:spPr>
+        <p:txBody>
+          <a:bodyPr wrap="none" lIns="18288" rIns="18288" tIns="9144" bIns="9144">
+            <a:spAutoFit/>
+          </a:bodyPr>
+          <a:lstStyle/>
+          <a:p>
+            <a:pPr algn="ctr">
+              <a:spcAft>
+                <a:spcPts val="200"/>
+              </a:spcAft>
+            </a:pPr>
+            <a:r>
+              <a:rPr sz="1700" b="0">
+                <a:solidFill>
+                  <a:srgbClr val="000000"/>
+                </a:solidFill>
+                <a:latin typeface="Noto Sans CJK JP"/>
+              </a:rPr>
+              <a:t>話者 3 + 4</a:t>
+            </a:r>
+          </a:p>
+        </p:txBody>
+      </p:sp>
+      <p:sp>
+        <p:nvSpPr>
+          <p:cNvPr id="134" name="Rounded Rectangle 133"/>
+          <p:cNvSpPr/>
+          <p:nvPr/>
+        </p:nvSpPr>
+        <p:spPr>
+          <a:xfrm>
+            <a:off x="2029968" y="4434840"/>
+            <a:ext cx="1280160" cy="1755648"/>
+          </a:xfrm>
+          <a:prstGeom prst="roundRect">
+            <a:avLst>
+              <a:gd name="adj" fmla="val 10000"/>
+            </a:avLst>
+          </a:prstGeom>
+          <a:solidFill>
+            <a:srgbClr val="F3F3F3"/>
+          </a:solidFill>
+          <a:ln w="21590">
+            <a:solidFill>
+              <a:srgbClr val="44546A"/>
+            </a:solidFill>
+          </a:ln>
+        </p:spPr>
+        <p:style>
+          <a:lnRef idx="1">
+            <a:schemeClr val="accent1"/>
+          </a:lnRef>
+          <a:fillRef idx="3">
+            <a:schemeClr val="accent1"/>
+          </a:fillRef>
+          <a:effectRef idx="0">
+            <a:schemeClr val="accent1"/>
+          </a:effectRef>
+          <a:fontRef idx="minor">
+            <a:schemeClr val="lt1"/>
+          </a:fontRef>
+        </p:style>
+        <p:txBody>
+          <a:bodyPr rtlCol="0" anchor="ctr" wrap="none" lIns="22860" rIns="22860"/>
+          <a:lstStyle/>
+          <a:p>
+            <a:pPr algn="ctr"/>
+            <a:r>
+              <a:rPr sz="2200" b="1">
+                <a:solidFill>
+                  <a:srgbClr val="000000"/>
+                </a:solidFill>
+                <a:latin typeface="Arial"/>
+              </a:rPr>
+              <a:t>Encoder</a:t>
             </a:r>
           </a:p>
         </p:txBody>
       </p:sp>
       <p:cxnSp>
         <p:nvCxnSpPr>
-          <p:cNvPr id="132" name="Connector 131"/>
+          <p:cNvPr id="135" name="Connector 134"/>
           <p:cNvCxnSpPr/>
           <p:nvPr/>
         </p:nvCxnSpPr>
         <p:spPr>
           <a:xfrm>
-            <a:off x="7443216" y="3364992"/>
-            <a:ext cx="0" cy="585216"/>
+            <a:off x="1783080" y="5312664"/>
+            <a:ext cx="246888" cy="0"/>
           </a:xfrm>
           <a:prstGeom prst="line">
             <a:avLst/>
           </a:prstGeom>
-          <a:ln w="22860">
+          <a:ln w="20320">
             <a:solidFill>
-              <a:srgbClr val="B45B58"/>
+              <a:srgbClr val="44546A"/>
             </a:solidFill>
-            <a:prstDash val="dash"/>
-            <a:headEnd type="triangle" w="sm" len="sm"/>
-            <a:tailEnd type="triangle" w="sm" len="sm"/>
+            <a:tailEnd type="triangle"/>
           </a:ln>
-          <a:effectLst/>
         </p:spPr>
         <p:style>
           <a:lnRef idx="2">
@@ -18247,7 +19324,7 @@
           <a:fillRef idx="0">
             <a:schemeClr val="accent1"/>
           </a:fillRef>
-          <a:effectRef idx="1">
+          <a:effectRef idx="0">
             <a:schemeClr val="accent1"/>
           </a:effectRef>
           <a:fontRef idx="minor">
@@ -18257,27 +19334,23 @@
       </p:cxnSp>
       <p:cxnSp>
         <p:nvCxnSpPr>
-          <p:cNvPr id="133" name="Connector 132"/>
+          <p:cNvPr id="136" name="Connector 135"/>
           <p:cNvCxnSpPr/>
           <p:nvPr/>
         </p:nvCxnSpPr>
         <p:spPr>
           <a:xfrm>
-            <a:off x="8202168" y="3364992"/>
-            <a:ext cx="1307592" cy="585216"/>
+            <a:off x="3310128" y="5312664"/>
+            <a:ext cx="292608" cy="0"/>
           </a:xfrm>
           <a:prstGeom prst="line">
             <a:avLst/>
           </a:prstGeom>
-          <a:ln w="22860">
+          <a:ln w="20320">
             <a:solidFill>
-              <a:srgbClr val="B45B58"/>
+              <a:srgbClr val="44546A"/>
             </a:solidFill>
-            <a:prstDash val="dash"/>
-            <a:headEnd type="triangle" w="sm" len="sm"/>
-            <a:tailEnd type="triangle" w="sm" len="sm"/>
           </a:ln>
-          <a:effectLst/>
         </p:spPr>
         <p:style>
           <a:lnRef idx="2">
@@ -18286,7 +19359,42 @@
           <a:fillRef idx="0">
             <a:schemeClr val="accent1"/>
           </a:fillRef>
-          <a:effectRef idx="1">
+          <a:effectRef idx="0">
+            <a:schemeClr val="accent1"/>
+          </a:effectRef>
+          <a:fontRef idx="minor">
+            <a:schemeClr val="tx1"/>
+          </a:fontRef>
+        </p:style>
+      </p:cxnSp>
+      <p:cxnSp>
+        <p:nvCxnSpPr>
+          <p:cNvPr id="137" name="Connector 136"/>
+          <p:cNvCxnSpPr/>
+          <p:nvPr/>
+        </p:nvCxnSpPr>
+        <p:spPr>
+          <a:xfrm>
+            <a:off x="3602736" y="4672584"/>
+            <a:ext cx="0" cy="1280160"/>
+          </a:xfrm>
+          <a:prstGeom prst="line">
+            <a:avLst/>
+          </a:prstGeom>
+          <a:ln w="20320">
+            <a:solidFill>
+              <a:srgbClr val="44546A"/>
+            </a:solidFill>
+          </a:ln>
+        </p:spPr>
+        <p:style>
+          <a:lnRef idx="2">
+            <a:schemeClr val="accent1"/>
+          </a:lnRef>
+          <a:fillRef idx="0">
+            <a:schemeClr val="accent1"/>
+          </a:fillRef>
+          <a:effectRef idx="0">
             <a:schemeClr val="accent1"/>
           </a:effectRef>
           <a:fontRef idx="minor">
@@ -18296,14 +19404,652 @@
       </p:cxnSp>
       <p:sp>
         <p:nvSpPr>
-          <p:cNvPr id="134" name="TextBox 133"/>
+          <p:cNvPr id="138" name="Rounded Rectangle 137"/>
+          <p:cNvSpPr/>
+          <p:nvPr/>
+        </p:nvSpPr>
+        <p:spPr>
+          <a:xfrm>
+            <a:off x="3904487" y="4434840"/>
+            <a:ext cx="2267712" cy="475488"/>
+          </a:xfrm>
+          <a:prstGeom prst="roundRect">
+            <a:avLst>
+              <a:gd name="adj" fmla="val 10000"/>
+            </a:avLst>
+          </a:prstGeom>
+          <a:solidFill>
+            <a:srgbClr val="FCE5CD"/>
+          </a:solidFill>
+          <a:ln w="21590">
+            <a:solidFill>
+              <a:srgbClr val="BC823E"/>
+            </a:solidFill>
+          </a:ln>
+        </p:spPr>
+        <p:style>
+          <a:lnRef idx="1">
+            <a:schemeClr val="accent1"/>
+          </a:lnRef>
+          <a:fillRef idx="3">
+            <a:schemeClr val="accent1"/>
+          </a:fillRef>
+          <a:effectRef idx="0">
+            <a:schemeClr val="accent1"/>
+          </a:effectRef>
+          <a:fontRef idx="minor">
+            <a:schemeClr val="lt1"/>
+          </a:fontRef>
+        </p:style>
+        <p:txBody>
+          <a:bodyPr rtlCol="0" anchor="ctr" wrap="none" lIns="22860" rIns="22860"/>
+          <a:lstStyle/>
+          <a:p>
+            <a:pPr algn="ctr"/>
+            <a:r>
+              <a:rPr sz="2200" b="1">
+                <a:solidFill>
+                  <a:srgbClr val="000000"/>
+                </a:solidFill>
+                <a:latin typeface="Arial"/>
+              </a:rPr>
+              <a:t>Path 1 emb</a:t>
+            </a:r>
+          </a:p>
+        </p:txBody>
+      </p:sp>
+      <p:cxnSp>
+        <p:nvCxnSpPr>
+          <p:cNvPr id="139" name="Connector 138"/>
+          <p:cNvCxnSpPr/>
+          <p:nvPr/>
+        </p:nvCxnSpPr>
+        <p:spPr>
+          <a:xfrm>
+            <a:off x="3602736" y="4672584"/>
+            <a:ext cx="301751" cy="0"/>
+          </a:xfrm>
+          <a:prstGeom prst="line">
+            <a:avLst/>
+          </a:prstGeom>
+          <a:ln w="20320">
+            <a:solidFill>
+              <a:srgbClr val="44546A"/>
+            </a:solidFill>
+            <a:tailEnd type="triangle"/>
+          </a:ln>
+        </p:spPr>
+        <p:style>
+          <a:lnRef idx="2">
+            <a:schemeClr val="accent1"/>
+          </a:lnRef>
+          <a:fillRef idx="0">
+            <a:schemeClr val="accent1"/>
+          </a:fillRef>
+          <a:effectRef idx="0">
+            <a:schemeClr val="accent1"/>
+          </a:effectRef>
+          <a:fontRef idx="minor">
+            <a:schemeClr val="tx1"/>
+          </a:fontRef>
+        </p:style>
+      </p:cxnSp>
+      <p:sp>
+        <p:nvSpPr>
+          <p:cNvPr id="140" name="Rounded Rectangle 139"/>
+          <p:cNvSpPr/>
+          <p:nvPr/>
+        </p:nvSpPr>
+        <p:spPr>
+          <a:xfrm>
+            <a:off x="3904487" y="5074920"/>
+            <a:ext cx="2267712" cy="475488"/>
+          </a:xfrm>
+          <a:prstGeom prst="roundRect">
+            <a:avLst>
+              <a:gd name="adj" fmla="val 10000"/>
+            </a:avLst>
+          </a:prstGeom>
+          <a:solidFill>
+            <a:srgbClr val="D9EAD3"/>
+          </a:solidFill>
+          <a:ln w="21590">
+            <a:solidFill>
+              <a:srgbClr val="44546A"/>
+            </a:solidFill>
+          </a:ln>
+        </p:spPr>
+        <p:style>
+          <a:lnRef idx="1">
+            <a:schemeClr val="accent1"/>
+          </a:lnRef>
+          <a:fillRef idx="3">
+            <a:schemeClr val="accent1"/>
+          </a:fillRef>
+          <a:effectRef idx="0">
+            <a:schemeClr val="accent1"/>
+          </a:effectRef>
+          <a:fontRef idx="minor">
+            <a:schemeClr val="lt1"/>
+          </a:fontRef>
+        </p:style>
+        <p:txBody>
+          <a:bodyPr rtlCol="0" anchor="ctr" wrap="none" lIns="22860" rIns="22860"/>
+          <a:lstStyle/>
+          <a:p>
+            <a:pPr algn="ctr"/>
+            <a:r>
+              <a:rPr sz="2200" b="1">
+                <a:solidFill>
+                  <a:srgbClr val="000000"/>
+                </a:solidFill>
+                <a:latin typeface="Arial"/>
+              </a:rPr>
+              <a:t>Room emb</a:t>
+            </a:r>
+          </a:p>
+        </p:txBody>
+      </p:sp>
+      <p:cxnSp>
+        <p:nvCxnSpPr>
+          <p:cNvPr id="141" name="Connector 140"/>
+          <p:cNvCxnSpPr/>
+          <p:nvPr/>
+        </p:nvCxnSpPr>
+        <p:spPr>
+          <a:xfrm>
+            <a:off x="3602736" y="5312664"/>
+            <a:ext cx="301751" cy="0"/>
+          </a:xfrm>
+          <a:prstGeom prst="line">
+            <a:avLst/>
+          </a:prstGeom>
+          <a:ln w="20320">
+            <a:solidFill>
+              <a:srgbClr val="44546A"/>
+            </a:solidFill>
+            <a:tailEnd type="triangle"/>
+          </a:ln>
+        </p:spPr>
+        <p:style>
+          <a:lnRef idx="2">
+            <a:schemeClr val="accent1"/>
+          </a:lnRef>
+          <a:fillRef idx="0">
+            <a:schemeClr val="accent1"/>
+          </a:fillRef>
+          <a:effectRef idx="0">
+            <a:schemeClr val="accent1"/>
+          </a:effectRef>
+          <a:fontRef idx="minor">
+            <a:schemeClr val="tx1"/>
+          </a:fontRef>
+        </p:style>
+      </p:cxnSp>
+      <p:sp>
+        <p:nvSpPr>
+          <p:cNvPr id="142" name="Rounded Rectangle 141"/>
+          <p:cNvSpPr/>
+          <p:nvPr/>
+        </p:nvSpPr>
+        <p:spPr>
+          <a:xfrm>
+            <a:off x="3904487" y="5715000"/>
+            <a:ext cx="2267712" cy="475488"/>
+          </a:xfrm>
+          <a:prstGeom prst="roundRect">
+            <a:avLst>
+              <a:gd name="adj" fmla="val 10000"/>
+            </a:avLst>
+          </a:prstGeom>
+          <a:solidFill>
+            <a:srgbClr val="FFF2CC"/>
+          </a:solidFill>
+          <a:ln w="21590">
+            <a:solidFill>
+              <a:srgbClr val="44546A"/>
+            </a:solidFill>
+          </a:ln>
+        </p:spPr>
+        <p:style>
+          <a:lnRef idx="1">
+            <a:schemeClr val="accent1"/>
+          </a:lnRef>
+          <a:fillRef idx="3">
+            <a:schemeClr val="accent1"/>
+          </a:fillRef>
+          <a:effectRef idx="0">
+            <a:schemeClr val="accent1"/>
+          </a:effectRef>
+          <a:fontRef idx="minor">
+            <a:schemeClr val="lt1"/>
+          </a:fontRef>
+        </p:style>
+        <p:txBody>
+          <a:bodyPr rtlCol="0" anchor="ctr" wrap="none" lIns="22860" rIns="22860"/>
+          <a:lstStyle/>
+          <a:p>
+            <a:pPr algn="ctr"/>
+            <a:r>
+              <a:rPr sz="2200" b="1">
+                <a:solidFill>
+                  <a:srgbClr val="000000"/>
+                </a:solidFill>
+                <a:latin typeface="Arial"/>
+              </a:rPr>
+              <a:t>Path 2 emb</a:t>
+            </a:r>
+          </a:p>
+        </p:txBody>
+      </p:sp>
+      <p:cxnSp>
+        <p:nvCxnSpPr>
+          <p:cNvPr id="143" name="Connector 142"/>
+          <p:cNvCxnSpPr/>
+          <p:nvPr/>
+        </p:nvCxnSpPr>
+        <p:spPr>
+          <a:xfrm>
+            <a:off x="3602736" y="5952744"/>
+            <a:ext cx="301751" cy="0"/>
+          </a:xfrm>
+          <a:prstGeom prst="line">
+            <a:avLst/>
+          </a:prstGeom>
+          <a:ln w="20320">
+            <a:solidFill>
+              <a:srgbClr val="44546A"/>
+            </a:solidFill>
+            <a:tailEnd type="triangle"/>
+          </a:ln>
+        </p:spPr>
+        <p:style>
+          <a:lnRef idx="2">
+            <a:schemeClr val="accent1"/>
+          </a:lnRef>
+          <a:fillRef idx="0">
+            <a:schemeClr val="accent1"/>
+          </a:fillRef>
+          <a:effectRef idx="0">
+            <a:schemeClr val="accent1"/>
+          </a:effectRef>
+          <a:fontRef idx="minor">
+            <a:schemeClr val="tx1"/>
+          </a:fontRef>
+        </p:style>
+      </p:cxnSp>
+      <p:sp>
+        <p:nvSpPr>
+          <p:cNvPr id="144" name="Rounded Rectangle 143"/>
+          <p:cNvSpPr/>
+          <p:nvPr/>
+        </p:nvSpPr>
+        <p:spPr>
+          <a:xfrm>
+            <a:off x="7607808" y="4325112"/>
+            <a:ext cx="1335024" cy="713232"/>
+          </a:xfrm>
+          <a:prstGeom prst="roundRect">
+            <a:avLst>
+              <a:gd name="adj" fmla="val 10000"/>
+            </a:avLst>
+          </a:prstGeom>
+          <a:solidFill>
+            <a:srgbClr val="F3F3F3"/>
+          </a:solidFill>
+          <a:ln w="21590">
+            <a:solidFill>
+              <a:srgbClr val="44546A"/>
+            </a:solidFill>
+          </a:ln>
+        </p:spPr>
+        <p:style>
+          <a:lnRef idx="1">
+            <a:schemeClr val="accent1"/>
+          </a:lnRef>
+          <a:fillRef idx="3">
+            <a:schemeClr val="accent1"/>
+          </a:fillRef>
+          <a:effectRef idx="0">
+            <a:schemeClr val="accent1"/>
+          </a:effectRef>
+          <a:fontRef idx="minor">
+            <a:schemeClr val="lt1"/>
+          </a:fontRef>
+        </p:style>
+        <p:txBody>
+          <a:bodyPr rtlCol="0" anchor="ctr" wrap="none" lIns="22860" rIns="22860"/>
+          <a:lstStyle/>
+          <a:p>
+            <a:pPr algn="ctr"/>
+            <a:r>
+              <a:rPr sz="2100" b="1">
+                <a:solidFill>
+                  <a:srgbClr val="000000"/>
+                </a:solidFill>
+                <a:latin typeface="Arial"/>
+              </a:rPr>
+              <a:t>Decoder</a:t>
+            </a:r>
+          </a:p>
+        </p:txBody>
+      </p:sp>
+      <p:sp>
+        <p:nvSpPr>
+          <p:cNvPr id="145" name="Rounded Rectangle 144"/>
+          <p:cNvSpPr/>
+          <p:nvPr/>
+        </p:nvSpPr>
+        <p:spPr>
+          <a:xfrm>
+            <a:off x="7607808" y="5605272"/>
+            <a:ext cx="1335024" cy="713232"/>
+          </a:xfrm>
+          <a:prstGeom prst="roundRect">
+            <a:avLst>
+              <a:gd name="adj" fmla="val 10000"/>
+            </a:avLst>
+          </a:prstGeom>
+          <a:solidFill>
+            <a:srgbClr val="F3F3F3"/>
+          </a:solidFill>
+          <a:ln w="21590">
+            <a:solidFill>
+              <a:srgbClr val="44546A"/>
+            </a:solidFill>
+          </a:ln>
+        </p:spPr>
+        <p:style>
+          <a:lnRef idx="1">
+            <a:schemeClr val="accent1"/>
+          </a:lnRef>
+          <a:fillRef idx="3">
+            <a:schemeClr val="accent1"/>
+          </a:fillRef>
+          <a:effectRef idx="0">
+            <a:schemeClr val="accent1"/>
+          </a:effectRef>
+          <a:fontRef idx="minor">
+            <a:schemeClr val="lt1"/>
+          </a:fontRef>
+        </p:style>
+        <p:txBody>
+          <a:bodyPr rtlCol="0" anchor="ctr" wrap="none" lIns="22860" rIns="22860"/>
+          <a:lstStyle/>
+          <a:p>
+            <a:pPr algn="ctr"/>
+            <a:r>
+              <a:rPr sz="2100" b="1">
+                <a:solidFill>
+                  <a:srgbClr val="000000"/>
+                </a:solidFill>
+                <a:latin typeface="Arial"/>
+              </a:rPr>
+              <a:t>Decoder</a:t>
+            </a:r>
+          </a:p>
+        </p:txBody>
+      </p:sp>
+      <p:cxnSp>
+        <p:nvCxnSpPr>
+          <p:cNvPr id="146" name="Connector 145"/>
+          <p:cNvCxnSpPr/>
+          <p:nvPr/>
+        </p:nvCxnSpPr>
+        <p:spPr>
+          <a:xfrm>
+            <a:off x="6172200" y="4672584"/>
+            <a:ext cx="1435608" cy="0"/>
+          </a:xfrm>
+          <a:prstGeom prst="line">
+            <a:avLst/>
+          </a:prstGeom>
+          <a:ln w="20320">
+            <a:solidFill>
+              <a:srgbClr val="44546A"/>
+            </a:solidFill>
+            <a:tailEnd type="triangle"/>
+          </a:ln>
+        </p:spPr>
+        <p:style>
+          <a:lnRef idx="2">
+            <a:schemeClr val="accent1"/>
+          </a:lnRef>
+          <a:fillRef idx="0">
+            <a:schemeClr val="accent1"/>
+          </a:fillRef>
+          <a:effectRef idx="0">
+            <a:schemeClr val="accent1"/>
+          </a:effectRef>
+          <a:fontRef idx="minor">
+            <a:schemeClr val="tx1"/>
+          </a:fontRef>
+        </p:style>
+      </p:cxnSp>
+      <p:cxnSp>
+        <p:nvCxnSpPr>
+          <p:cNvPr id="147" name="Connector 146"/>
+          <p:cNvCxnSpPr/>
+          <p:nvPr/>
+        </p:nvCxnSpPr>
+        <p:spPr>
+          <a:xfrm>
+            <a:off x="6172200" y="5952744"/>
+            <a:ext cx="1435608" cy="0"/>
+          </a:xfrm>
+          <a:prstGeom prst="line">
+            <a:avLst/>
+          </a:prstGeom>
+          <a:ln w="20320">
+            <a:solidFill>
+              <a:srgbClr val="44546A"/>
+            </a:solidFill>
+            <a:tailEnd type="triangle"/>
+          </a:ln>
+        </p:spPr>
+        <p:style>
+          <a:lnRef idx="2">
+            <a:schemeClr val="accent1"/>
+          </a:lnRef>
+          <a:fillRef idx="0">
+            <a:schemeClr val="accent1"/>
+          </a:fillRef>
+          <a:effectRef idx="0">
+            <a:schemeClr val="accent1"/>
+          </a:effectRef>
+          <a:fontRef idx="minor">
+            <a:schemeClr val="tx1"/>
+          </a:fontRef>
+        </p:style>
+      </p:cxnSp>
+      <p:cxnSp>
+        <p:nvCxnSpPr>
+          <p:cNvPr id="148" name="Connector 147"/>
+          <p:cNvCxnSpPr/>
+          <p:nvPr/>
+        </p:nvCxnSpPr>
+        <p:spPr>
+          <a:xfrm>
+            <a:off x="6172200" y="5312664"/>
+            <a:ext cx="978408" cy="0"/>
+          </a:xfrm>
+          <a:prstGeom prst="line">
+            <a:avLst/>
+          </a:prstGeom>
+          <a:ln w="20320">
+            <a:solidFill>
+              <a:srgbClr val="44546A"/>
+            </a:solidFill>
+          </a:ln>
+        </p:spPr>
+        <p:style>
+          <a:lnRef idx="2">
+            <a:schemeClr val="accent1"/>
+          </a:lnRef>
+          <a:fillRef idx="0">
+            <a:schemeClr val="accent1"/>
+          </a:fillRef>
+          <a:effectRef idx="0">
+            <a:schemeClr val="accent1"/>
+          </a:effectRef>
+          <a:fontRef idx="minor">
+            <a:schemeClr val="tx1"/>
+          </a:fontRef>
+        </p:style>
+      </p:cxnSp>
+      <p:cxnSp>
+        <p:nvCxnSpPr>
+          <p:cNvPr id="149" name="Connector 148"/>
+          <p:cNvCxnSpPr/>
+          <p:nvPr/>
+        </p:nvCxnSpPr>
+        <p:spPr>
+          <a:xfrm>
+            <a:off x="7150608" y="4892040"/>
+            <a:ext cx="0" cy="868680"/>
+          </a:xfrm>
+          <a:prstGeom prst="line">
+            <a:avLst/>
+          </a:prstGeom>
+          <a:ln w="20320">
+            <a:solidFill>
+              <a:srgbClr val="44546A"/>
+            </a:solidFill>
+          </a:ln>
+        </p:spPr>
+        <p:style>
+          <a:lnRef idx="2">
+            <a:schemeClr val="accent1"/>
+          </a:lnRef>
+          <a:fillRef idx="0">
+            <a:schemeClr val="accent1"/>
+          </a:fillRef>
+          <a:effectRef idx="0">
+            <a:schemeClr val="accent1"/>
+          </a:effectRef>
+          <a:fontRef idx="minor">
+            <a:schemeClr val="tx1"/>
+          </a:fontRef>
+        </p:style>
+      </p:cxnSp>
+      <p:cxnSp>
+        <p:nvCxnSpPr>
+          <p:cNvPr id="150" name="Connector 149"/>
+          <p:cNvCxnSpPr/>
+          <p:nvPr/>
+        </p:nvCxnSpPr>
+        <p:spPr>
+          <a:xfrm>
+            <a:off x="7150608" y="4892040"/>
+            <a:ext cx="457200" cy="0"/>
+          </a:xfrm>
+          <a:prstGeom prst="line">
+            <a:avLst/>
+          </a:prstGeom>
+          <a:ln w="20320">
+            <a:solidFill>
+              <a:srgbClr val="44546A"/>
+            </a:solidFill>
+            <a:tailEnd type="triangle"/>
+          </a:ln>
+        </p:spPr>
+        <p:style>
+          <a:lnRef idx="2">
+            <a:schemeClr val="accent1"/>
+          </a:lnRef>
+          <a:fillRef idx="0">
+            <a:schemeClr val="accent1"/>
+          </a:fillRef>
+          <a:effectRef idx="0">
+            <a:schemeClr val="accent1"/>
+          </a:effectRef>
+          <a:fontRef idx="minor">
+            <a:schemeClr val="tx1"/>
+          </a:fontRef>
+        </p:style>
+      </p:cxnSp>
+      <p:cxnSp>
+        <p:nvCxnSpPr>
+          <p:cNvPr id="151" name="Connector 150"/>
+          <p:cNvCxnSpPr/>
+          <p:nvPr/>
+        </p:nvCxnSpPr>
+        <p:spPr>
+          <a:xfrm>
+            <a:off x="7150608" y="5760720"/>
+            <a:ext cx="457200" cy="0"/>
+          </a:xfrm>
+          <a:prstGeom prst="line">
+            <a:avLst/>
+          </a:prstGeom>
+          <a:ln w="20320">
+            <a:solidFill>
+              <a:srgbClr val="44546A"/>
+            </a:solidFill>
+            <a:tailEnd type="triangle"/>
+          </a:ln>
+        </p:spPr>
+        <p:style>
+          <a:lnRef idx="2">
+            <a:schemeClr val="accent1"/>
+          </a:lnRef>
+          <a:fillRef idx="0">
+            <a:schemeClr val="accent1"/>
+          </a:fillRef>
+          <a:effectRef idx="0">
+            <a:schemeClr val="accent1"/>
+          </a:effectRef>
+          <a:fontRef idx="minor">
+            <a:schemeClr val="tx1"/>
+          </a:fontRef>
+        </p:style>
+      </p:cxnSp>
+      <p:cxnSp>
+        <p:nvCxnSpPr>
+          <p:cNvPr id="152" name="Connector 151"/>
+          <p:cNvCxnSpPr/>
+          <p:nvPr/>
+        </p:nvCxnSpPr>
+        <p:spPr>
+          <a:xfrm>
+            <a:off x="8942832" y="4672584"/>
+            <a:ext cx="402336" cy="0"/>
+          </a:xfrm>
+          <a:prstGeom prst="line">
+            <a:avLst/>
+          </a:prstGeom>
+          <a:ln w="20320">
+            <a:solidFill>
+              <a:srgbClr val="44546A"/>
+            </a:solidFill>
+            <a:tailEnd type="triangle"/>
+          </a:ln>
+        </p:spPr>
+        <p:style>
+          <a:lnRef idx="2">
+            <a:schemeClr val="accent1"/>
+          </a:lnRef>
+          <a:fillRef idx="0">
+            <a:schemeClr val="accent1"/>
+          </a:fillRef>
+          <a:effectRef idx="0">
+            <a:schemeClr val="accent1"/>
+          </a:effectRef>
+          <a:fontRef idx="minor">
+            <a:schemeClr val="tx1"/>
+          </a:fontRef>
+        </p:style>
+      </p:cxnSp>
+      <p:sp>
+        <p:nvSpPr>
+          <p:cNvPr id="153" name="TextBox 152"/>
           <p:cNvSpPr txBox="1"/>
           <p:nvPr/>
         </p:nvSpPr>
         <p:spPr>
           <a:xfrm>
-            <a:off x="7982712" y="3602736"/>
-            <a:ext cx="1517904" cy="265176"/>
+            <a:off x="9464040" y="4453128"/>
+            <a:ext cx="1463040" cy="384048"/>
           </a:xfrm>
           <a:prstGeom prst="rect">
             <a:avLst/>
@@ -18311,38 +20057,74 @@
           <a:noFill/>
         </p:spPr>
         <p:txBody>
-          <a:bodyPr wrap="square" lIns="22860" rIns="22860" tIns="13716" bIns="13716">
+          <a:bodyPr wrap="none" lIns="18288" rIns="18288" tIns="9144" bIns="9144">
             <a:spAutoFit/>
           </a:bodyPr>
           <a:lstStyle/>
           <a:p>
-            <a:pPr algn="ctr">
-              <a:spcAft>
-                <a:spcPts val="300"/>
+            <a:pPr algn="l">
+              <a:spcAft>
+                <a:spcPts val="200"/>
               </a:spcAft>
             </a:pPr>
             <a:r>
-              <a:rPr sz="1400" b="0">
-                <a:solidFill>
-                  <a:srgbClr val="B45B58"/>
+              <a:rPr sz="2400" b="1">
+                <a:solidFill>
+                  <a:srgbClr val="000000"/>
                 </a:solidFill>
                 <a:latin typeface="Arial"/>
               </a:rPr>
-              <a:t>push apart</a:t>
+              <a:t>CTF 1</a:t>
             </a:r>
           </a:p>
         </p:txBody>
       </p:sp>
+      <p:cxnSp>
+        <p:nvCxnSpPr>
+          <p:cNvPr id="154" name="Connector 153"/>
+          <p:cNvCxnSpPr/>
+          <p:nvPr/>
+        </p:nvCxnSpPr>
+        <p:spPr>
+          <a:xfrm>
+            <a:off x="8942832" y="5952744"/>
+            <a:ext cx="402336" cy="0"/>
+          </a:xfrm>
+          <a:prstGeom prst="line">
+            <a:avLst/>
+          </a:prstGeom>
+          <a:ln w="20320">
+            <a:solidFill>
+              <a:srgbClr val="44546A"/>
+            </a:solidFill>
+            <a:tailEnd type="triangle"/>
+          </a:ln>
+        </p:spPr>
+        <p:style>
+          <a:lnRef idx="2">
+            <a:schemeClr val="accent1"/>
+          </a:lnRef>
+          <a:fillRef idx="0">
+            <a:schemeClr val="accent1"/>
+          </a:fillRef>
+          <a:effectRef idx="0">
+            <a:schemeClr val="accent1"/>
+          </a:effectRef>
+          <a:fontRef idx="minor">
+            <a:schemeClr val="tx1"/>
+          </a:fontRef>
+        </p:style>
+      </p:cxnSp>
       <p:sp>
         <p:nvSpPr>
-          <p:cNvPr id="135" name="TextBox 134"/>
+          <p:cNvPr id="155" name="TextBox 154"/>
           <p:cNvSpPr txBox="1"/>
           <p:nvPr/>
         </p:nvSpPr>
         <p:spPr>
           <a:xfrm>
-            <a:off x="6446520" y="4700016"/>
-            <a:ext cx="5166360" cy="676656"/>
+            <a:off x="9464040" y="5733288"/>
+            <a:ext cx="1463040" cy="384048"/>
           </a:xfrm>
           <a:prstGeom prst="rect">
             <a:avLst/>
@@ -18350,54 +20132,38 @@
           <a:noFill/>
         </p:spPr>
         <p:txBody>
-          <a:bodyPr wrap="square" lIns="22860" rIns="22860" tIns="13716" bIns="13716">
+          <a:bodyPr wrap="none" lIns="18288" rIns="18288" tIns="9144" bIns="9144">
             <a:spAutoFit/>
           </a:bodyPr>
           <a:lstStyle/>
           <a:p>
             <a:pPr algn="l">
               <a:spcAft>
-                <a:spcPts val="300"/>
+                <a:spcPts val="200"/>
               </a:spcAft>
             </a:pPr>
             <a:r>
-              <a:rPr sz="1800" b="0">
+              <a:rPr sz="2400" b="1">
                 <a:solidFill>
                   <a:srgbClr val="000000"/>
                 </a:solidFill>
                 <a:latin typeface="Arial"/>
               </a:rPr>
-              <a:t>+ Same physical path, aligned by CTF PIT</a:t>
-            </a:r>
-          </a:p>
-          <a:p>
-            <a:pPr algn="l">
-              <a:spcAft>
-                <a:spcPts val="300"/>
-              </a:spcAft>
-            </a:pPr>
-            <a:r>
-              <a:rPr sz="1800" b="0">
-                <a:solidFill>
-                  <a:srgbClr val="000000"/>
-                </a:solidFill>
-                <a:latin typeface="Arial"/>
-              </a:rPr>
-              <a:t>− The other path in the same item only</a:t>
+              <a:t>CTF 2</a:t>
             </a:r>
           </a:p>
         </p:txBody>
       </p:sp>
       <p:sp>
         <p:nvSpPr>
-          <p:cNvPr id="136" name="TextBox 135"/>
+          <p:cNvPr id="156" name="TextBox 155"/>
           <p:cNvSpPr txBox="1"/>
           <p:nvPr/>
         </p:nvSpPr>
         <p:spPr>
           <a:xfrm>
-            <a:off x="685800" y="5504688"/>
-            <a:ext cx="10972800" cy="301752"/>
+            <a:off x="1874519" y="3886200"/>
+            <a:ext cx="2011680" cy="283464"/>
           </a:xfrm>
           <a:prstGeom prst="rect">
             <a:avLst/>
@@ -18405,38 +20171,310 @@
           <a:noFill/>
         </p:spPr>
         <p:txBody>
-          <a:bodyPr wrap="square" lIns="22860" rIns="22860" tIns="13716" bIns="13716">
+          <a:bodyPr wrap="none" lIns="18288" rIns="18288" tIns="9144" bIns="9144">
             <a:spAutoFit/>
           </a:bodyPr>
           <a:lstStyle/>
           <a:p>
-            <a:pPr algn="l">
-              <a:spcAft>
-                <a:spcPts val="300"/>
+            <a:pPr algn="ctr">
+              <a:spcAft>
+                <a:spcPts val="200"/>
               </a:spcAft>
             </a:pPr>
             <a:r>
-              <a:rPr sz="2000" b="0">
+              <a:rPr sz="1500" b="0">
+                <a:solidFill>
+                  <a:srgbClr val="777777"/>
+                </a:solidFill>
+                <a:latin typeface="Noto Sans CJK JP"/>
+              </a:rPr>
+              <a:t>同じモデル</a:t>
+            </a:r>
+          </a:p>
+        </p:txBody>
+      </p:sp>
+      <p:cxnSp>
+        <p:nvCxnSpPr>
+          <p:cNvPr id="157" name="Connector 156"/>
+          <p:cNvCxnSpPr/>
+          <p:nvPr/>
+        </p:nvCxnSpPr>
+        <p:spPr>
+          <a:xfrm>
+            <a:off x="6172200" y="2157984"/>
+            <a:ext cx="374904" cy="0"/>
+          </a:xfrm>
+          <a:prstGeom prst="line">
+            <a:avLst/>
+          </a:prstGeom>
+          <a:ln w="33020">
+            <a:solidFill>
+              <a:srgbClr val="BC823E"/>
+            </a:solidFill>
+            <a:prstDash val="dash"/>
+          </a:ln>
+        </p:spPr>
+        <p:style>
+          <a:lnRef idx="2">
+            <a:schemeClr val="accent1"/>
+          </a:lnRef>
+          <a:fillRef idx="0">
+            <a:schemeClr val="accent1"/>
+          </a:fillRef>
+          <a:effectRef idx="0">
+            <a:schemeClr val="accent1"/>
+          </a:effectRef>
+          <a:fontRef idx="minor">
+            <a:schemeClr val="tx1"/>
+          </a:fontRef>
+        </p:style>
+      </p:cxnSp>
+      <p:cxnSp>
+        <p:nvCxnSpPr>
+          <p:cNvPr id="158" name="Connector 157"/>
+          <p:cNvCxnSpPr/>
+          <p:nvPr/>
+        </p:nvCxnSpPr>
+        <p:spPr>
+          <a:xfrm>
+            <a:off x="6547104" y="2157984"/>
+            <a:ext cx="0" cy="1746503"/>
+          </a:xfrm>
+          <a:prstGeom prst="line">
+            <a:avLst/>
+          </a:prstGeom>
+          <a:ln w="33020">
+            <a:solidFill>
+              <a:srgbClr val="BC823E"/>
+            </a:solidFill>
+            <a:prstDash val="dash"/>
+          </a:ln>
+        </p:spPr>
+        <p:style>
+          <a:lnRef idx="2">
+            <a:schemeClr val="accent1"/>
+          </a:lnRef>
+          <a:fillRef idx="0">
+            <a:schemeClr val="accent1"/>
+          </a:fillRef>
+          <a:effectRef idx="0">
+            <a:schemeClr val="accent1"/>
+          </a:effectRef>
+          <a:fontRef idx="minor">
+            <a:schemeClr val="tx1"/>
+          </a:fontRef>
+        </p:style>
+      </p:cxnSp>
+      <p:cxnSp>
+        <p:nvCxnSpPr>
+          <p:cNvPr id="159" name="Connector 158"/>
+          <p:cNvCxnSpPr/>
+          <p:nvPr/>
+        </p:nvCxnSpPr>
+        <p:spPr>
+          <a:xfrm>
+            <a:off x="6172200" y="4672584"/>
+            <a:ext cx="374904" cy="0"/>
+          </a:xfrm>
+          <a:prstGeom prst="line">
+            <a:avLst/>
+          </a:prstGeom>
+          <a:ln w="33020">
+            <a:solidFill>
+              <a:srgbClr val="BC823E"/>
+            </a:solidFill>
+            <a:prstDash val="dash"/>
+          </a:ln>
+        </p:spPr>
+        <p:style>
+          <a:lnRef idx="2">
+            <a:schemeClr val="accent1"/>
+          </a:lnRef>
+          <a:fillRef idx="0">
+            <a:schemeClr val="accent1"/>
+          </a:fillRef>
+          <a:effectRef idx="0">
+            <a:schemeClr val="accent1"/>
+          </a:effectRef>
+          <a:fontRef idx="minor">
+            <a:schemeClr val="tx1"/>
+          </a:fontRef>
+        </p:style>
+      </p:cxnSp>
+      <p:cxnSp>
+        <p:nvCxnSpPr>
+          <p:cNvPr id="160" name="Connector 159"/>
+          <p:cNvCxnSpPr/>
+          <p:nvPr/>
+        </p:nvCxnSpPr>
+        <p:spPr>
+          <a:xfrm flipV="1">
+            <a:off x="6547104" y="4105656"/>
+            <a:ext cx="0" cy="566928"/>
+          </a:xfrm>
+          <a:prstGeom prst="line">
+            <a:avLst/>
+          </a:prstGeom>
+          <a:ln w="33020">
+            <a:solidFill>
+              <a:srgbClr val="BC823E"/>
+            </a:solidFill>
+            <a:prstDash val="dash"/>
+          </a:ln>
+        </p:spPr>
+        <p:style>
+          <a:lnRef idx="2">
+            <a:schemeClr val="accent1"/>
+          </a:lnRef>
+          <a:fillRef idx="0">
+            <a:schemeClr val="accent1"/>
+          </a:fillRef>
+          <a:effectRef idx="0">
+            <a:schemeClr val="accent1"/>
+          </a:effectRef>
+          <a:fontRef idx="minor">
+            <a:schemeClr val="tx1"/>
+          </a:fontRef>
+        </p:style>
+      </p:cxnSp>
+      <p:cxnSp>
+        <p:nvCxnSpPr>
+          <p:cNvPr id="161" name="Connector 160"/>
+          <p:cNvCxnSpPr/>
+          <p:nvPr/>
+        </p:nvCxnSpPr>
+        <p:spPr>
+          <a:xfrm>
+            <a:off x="6547104" y="3904487"/>
+            <a:ext cx="1042416" cy="0"/>
+          </a:xfrm>
+          <a:prstGeom prst="line">
+            <a:avLst/>
+          </a:prstGeom>
+          <a:ln w="33020">
+            <a:solidFill>
+              <a:srgbClr val="BC823E"/>
+            </a:solidFill>
+            <a:prstDash val="dash"/>
+          </a:ln>
+        </p:spPr>
+        <p:style>
+          <a:lnRef idx="2">
+            <a:schemeClr val="accent1"/>
+          </a:lnRef>
+          <a:fillRef idx="0">
+            <a:schemeClr val="accent1"/>
+          </a:fillRef>
+          <a:effectRef idx="0">
+            <a:schemeClr val="accent1"/>
+          </a:effectRef>
+          <a:fontRef idx="minor">
+            <a:schemeClr val="tx1"/>
+          </a:fontRef>
+        </p:style>
+      </p:cxnSp>
+      <p:cxnSp>
+        <p:nvCxnSpPr>
+          <p:cNvPr id="162" name="Connector 161"/>
+          <p:cNvCxnSpPr/>
+          <p:nvPr/>
+        </p:nvCxnSpPr>
+        <p:spPr>
+          <a:xfrm>
+            <a:off x="6547104" y="4105656"/>
+            <a:ext cx="1042416" cy="0"/>
+          </a:xfrm>
+          <a:prstGeom prst="line">
+            <a:avLst/>
+          </a:prstGeom>
+          <a:ln w="33020">
+            <a:solidFill>
+              <a:srgbClr val="BC823E"/>
+            </a:solidFill>
+            <a:prstDash val="dash"/>
+          </a:ln>
+        </p:spPr>
+        <p:style>
+          <a:lnRef idx="2">
+            <a:schemeClr val="accent1"/>
+          </a:lnRef>
+          <a:fillRef idx="0">
+            <a:schemeClr val="accent1"/>
+          </a:fillRef>
+          <a:effectRef idx="0">
+            <a:schemeClr val="accent1"/>
+          </a:effectRef>
+          <a:fontRef idx="minor">
+            <a:schemeClr val="tx1"/>
+          </a:fontRef>
+        </p:style>
+      </p:cxnSp>
+      <p:sp>
+        <p:nvSpPr>
+          <p:cNvPr id="163" name="Rounded Rectangle 162"/>
+          <p:cNvSpPr/>
+          <p:nvPr/>
+        </p:nvSpPr>
+        <p:spPr>
+          <a:xfrm>
+            <a:off x="7653527" y="3858768"/>
+            <a:ext cx="3310128" cy="402336"/>
+          </a:xfrm>
+          <a:prstGeom prst="roundRect">
+            <a:avLst>
+              <a:gd name="adj" fmla="val 10000"/>
+            </a:avLst>
+          </a:prstGeom>
+          <a:solidFill>
+            <a:srgbClr val="FCE5CD"/>
+          </a:solidFill>
+          <a:ln w="21590">
+            <a:solidFill>
+              <a:srgbClr val="BC823E"/>
+            </a:solidFill>
+          </a:ln>
+        </p:spPr>
+        <p:style>
+          <a:lnRef idx="1">
+            <a:schemeClr val="accent1"/>
+          </a:lnRef>
+          <a:fillRef idx="3">
+            <a:schemeClr val="accent1"/>
+          </a:fillRef>
+          <a:effectRef idx="0">
+            <a:schemeClr val="accent1"/>
+          </a:effectRef>
+          <a:fontRef idx="minor">
+            <a:schemeClr val="lt1"/>
+          </a:fontRef>
+        </p:style>
+        <p:txBody>
+          <a:bodyPr rtlCol="0" anchor="ctr" wrap="none" lIns="22860" rIns="22860"/>
+          <a:lstStyle/>
+          <a:p>
+            <a:pPr algn="ctr"/>
+            <a:r>
+              <a:rPr sz="1900" b="1">
                 <a:solidFill>
                   <a:srgbClr val="000000"/>
                 </a:solidFill>
-                <a:latin typeface="Arial"/>
+                <a:latin typeface="Noto Sans CJK JP"/>
               </a:rPr>
-              <a:t>Symmetric InfoNCE  |  Cosine similarity  |  Temperature τ = 0.1</a:t>
+              <a:t>同じ経路 → 近づける</a:t>
             </a:r>
           </a:p>
         </p:txBody>
       </p:sp>
       <p:sp>
         <p:nvSpPr>
-          <p:cNvPr id="137" name="TextBox 136"/>
+          <p:cNvPr id="164" name="TextBox 163"/>
           <p:cNvSpPr txBox="1"/>
           <p:nvPr/>
         </p:nvSpPr>
         <p:spPr>
           <a:xfrm>
-            <a:off x="685800" y="5925312"/>
-            <a:ext cx="10972800" cy="429768"/>
+            <a:off x="594360" y="6400800"/>
+            <a:ext cx="10332720" cy="265176"/>
           </a:xfrm>
           <a:prstGeom prst="rect">
             <a:avLst/>
@@ -18444,119 +20482,38 @@
           <a:noFill/>
         </p:spPr>
         <p:txBody>
-          <a:bodyPr wrap="square" lIns="22860" rIns="22860" tIns="13716" bIns="13716">
+          <a:bodyPr wrap="none" lIns="18288" rIns="18288" tIns="9144" bIns="9144">
             <a:spAutoFit/>
           </a:bodyPr>
           <a:lstStyle/>
           <a:p>
             <a:pPr algn="l">
               <a:spcAft>
-                <a:spcPts val="300"/>
+                <a:spcPts val="200"/>
               </a:spcAft>
             </a:pPr>
             <a:r>
-              <a:rPr sz="2500">
-                <a:solidFill>
-                  <a:srgbClr val="000000"/>
-                </a:solidFill>
-                <a:latin typeface="Arial"/>
+              <a:rPr sz="1600" b="0">
+                <a:solidFill>
+                  <a:srgbClr val="666666"/>
+                </a:solidFill>
+                <a:latin typeface="Noto Sans CJK JP"/>
               </a:rPr>
-              <a:t>L</a:t>
-            </a:r>
-            <a:r>
-              <a:rPr sz="1900" baseline="-25000">
-                <a:solidFill>
-                  <a:srgbClr val="000000"/>
-                </a:solidFill>
-                <a:latin typeface="Arial"/>
-              </a:rPr>
-              <a:t>total</a:t>
-            </a:r>
-            <a:r>
-              <a:rPr sz="2500">
-                <a:solidFill>
-                  <a:srgbClr val="000000"/>
-                </a:solidFill>
-                <a:latin typeface="Arial"/>
-              </a:rPr>
-              <a:t> = ½(L</a:t>
-            </a:r>
-            <a:r>
-              <a:rPr sz="1900" baseline="-25000">
-                <a:solidFill>
-                  <a:srgbClr val="000000"/>
-                </a:solidFill>
-                <a:latin typeface="Arial"/>
-              </a:rPr>
-              <a:t>sweep</a:t>
-            </a:r>
-            <a:r>
-              <a:rPr sz="2500">
-                <a:solidFill>
-                  <a:srgbClr val="000000"/>
-                </a:solidFill>
-                <a:latin typeface="Arial"/>
-              </a:rPr>
-              <a:t>ᴬ + L</a:t>
-            </a:r>
-            <a:r>
-              <a:rPr sz="1900" baseline="-25000">
-                <a:solidFill>
-                  <a:srgbClr val="000000"/>
-                </a:solidFill>
-                <a:latin typeface="Arial"/>
-              </a:rPr>
-              <a:t>sweep</a:t>
-            </a:r>
-            <a:r>
-              <a:rPr sz="2500">
-                <a:solidFill>
-                  <a:srgbClr val="000000"/>
-                </a:solidFill>
-                <a:latin typeface="Arial"/>
-              </a:rPr>
-              <a:t>ᴮ) + 0.01 L</a:t>
-            </a:r>
-            <a:r>
-              <a:rPr sz="1900" baseline="-25000">
-                <a:solidFill>
-                  <a:srgbClr val="000000"/>
-                </a:solidFill>
-                <a:latin typeface="Arial"/>
-              </a:rPr>
-              <a:t>room</a:t>
-            </a:r>
-            <a:r>
-              <a:rPr sz="2500">
-                <a:solidFill>
-                  <a:srgbClr val="000000"/>
-                </a:solidFill>
-                <a:latin typeface="Arial"/>
-              </a:rPr>
-              <a:t> + 0.01 L</a:t>
-            </a:r>
-            <a:r>
-              <a:rPr sz="1900" baseline="-25000">
-                <a:solidFill>
-                  <a:srgbClr val="000000"/>
-                </a:solidFill>
-                <a:latin typeface="Arial"/>
-              </a:rPr>
-              <a:t>path</a:t>
+              <a:t>もう一方の経路は離す  ／  Path 2 も同様</a:t>
             </a:r>
           </a:p>
         </p:txBody>
       </p:sp>
       <p:sp>
         <p:nvSpPr>
-          <p:cNvPr id="138" name="TextBox 137"/>
+          <p:cNvPr id="165" name="TextBox 164"/>
           <p:cNvSpPr txBox="1"/>
           <p:nvPr/>
         </p:nvSpPr>
         <p:spPr>
           <a:xfrm>
-            <a:off x="694944" y="6400800"/>
-            <a:ext cx="9784080" cy="237744"/>
+            <a:off x="10927080" y="6400800"/>
+            <a:ext cx="365760" cy="246888"/>
           </a:xfrm>
           <a:prstGeom prst="rect">
             <a:avLst/>
@@ -18564,24 +20521,24 @@
           <a:noFill/>
         </p:spPr>
         <p:txBody>
-          <a:bodyPr wrap="square" lIns="22860" rIns="22860" tIns="13716" bIns="13716">
+          <a:bodyPr wrap="none" lIns="18288" rIns="18288" tIns="9144" bIns="9144">
             <a:spAutoFit/>
           </a:bodyPr>
           <a:lstStyle/>
           <a:p>
-            <a:pPr algn="l">
-              <a:spcAft>
-                <a:spcPts val="300"/>
+            <a:pPr algn="r">
+              <a:spcAft>
+                <a:spcPts val="200"/>
               </a:spcAft>
             </a:pPr>
             <a:r>
-              <a:rPr sz="1100" b="0">
-                <a:solidFill>
-                  <a:srgbClr val="666666"/>
+              <a:rPr sz="1200" b="0">
+                <a:solidFill>
+                  <a:srgbClr val="888888"/>
                 </a:solidFill>
                 <a:latin typeface="Arial"/>
               </a:rPr>
-              <a:t>Training-only projections: 64 → 32 per frequency. Lpath uses path codes before slot embeddings.</a:t>
+              <a:t>2</a:t>
             </a:r>
           </a:p>
         </p:txBody>
